--- a/Linux/리눅스 공부.pptx
+++ b/Linux/리눅스 공부.pptx
@@ -6,6 +6,11 @@
   </p:sldMasterIdLst>
   <p:sldIdLst>
     <p:sldId id="256" r:id="rId2"/>
+    <p:sldId id="257" r:id="rId3"/>
+    <p:sldId id="258" r:id="rId4"/>
+    <p:sldId id="259" r:id="rId5"/>
+    <p:sldId id="260" r:id="rId6"/>
+    <p:sldId id="261" r:id="rId7"/>
   </p:sldIdLst>
   <p:sldSz cx="12192000" cy="6858000"/>
   <p:notesSz cx="6858000" cy="9144000"/>
@@ -104,6 +109,11 @@
       </a:defRPr>
     </a:lvl9pPr>
   </p:defaultTextStyle>
+  <p:extLst>
+    <p:ext uri="{EFAFB233-063F-42B5-8137-9DF3F51BA10A}">
+      <p15:sldGuideLst xmlns:p15="http://schemas.microsoft.com/office/powerpoint/2012/main"/>
+    </p:ext>
+  </p:extLst>
 </p:presentation>
 </file>
 
@@ -254,7 +264,7 @@
           <a:p>
             <a:fld id="{4EE28559-68A3-427A-B0AE-52D324B66369}" type="datetimeFigureOut">
               <a:rPr lang="ko-KR" altLang="en-US" smtClean="0"/>
-              <a:t>2026-07-09</a:t>
+              <a:t>2026-07-19</a:t>
             </a:fld>
             <a:endParaRPr lang="ko-KR" altLang="en-US"/>
           </a:p>
@@ -452,7 +462,7 @@
           <a:p>
             <a:fld id="{4EE28559-68A3-427A-B0AE-52D324B66369}" type="datetimeFigureOut">
               <a:rPr lang="ko-KR" altLang="en-US" smtClean="0"/>
-              <a:t>2026-07-09</a:t>
+              <a:t>2026-07-19</a:t>
             </a:fld>
             <a:endParaRPr lang="ko-KR" altLang="en-US"/>
           </a:p>
@@ -660,7 +670,7 @@
           <a:p>
             <a:fld id="{4EE28559-68A3-427A-B0AE-52D324B66369}" type="datetimeFigureOut">
               <a:rPr lang="ko-KR" altLang="en-US" smtClean="0"/>
-              <a:t>2026-07-09</a:t>
+              <a:t>2026-07-19</a:t>
             </a:fld>
             <a:endParaRPr lang="ko-KR" altLang="en-US"/>
           </a:p>
@@ -858,7 +868,7 @@
           <a:p>
             <a:fld id="{4EE28559-68A3-427A-B0AE-52D324B66369}" type="datetimeFigureOut">
               <a:rPr lang="ko-KR" altLang="en-US" smtClean="0"/>
-              <a:t>2026-07-09</a:t>
+              <a:t>2026-07-19</a:t>
             </a:fld>
             <a:endParaRPr lang="ko-KR" altLang="en-US"/>
           </a:p>
@@ -1133,7 +1143,7 @@
           <a:p>
             <a:fld id="{4EE28559-68A3-427A-B0AE-52D324B66369}" type="datetimeFigureOut">
               <a:rPr lang="ko-KR" altLang="en-US" smtClean="0"/>
-              <a:t>2026-07-09</a:t>
+              <a:t>2026-07-19</a:t>
             </a:fld>
             <a:endParaRPr lang="ko-KR" altLang="en-US"/>
           </a:p>
@@ -1398,7 +1408,7 @@
           <a:p>
             <a:fld id="{4EE28559-68A3-427A-B0AE-52D324B66369}" type="datetimeFigureOut">
               <a:rPr lang="ko-KR" altLang="en-US" smtClean="0"/>
-              <a:t>2026-07-09</a:t>
+              <a:t>2026-07-19</a:t>
             </a:fld>
             <a:endParaRPr lang="ko-KR" altLang="en-US"/>
           </a:p>
@@ -1810,7 +1820,7 @@
           <a:p>
             <a:fld id="{4EE28559-68A3-427A-B0AE-52D324B66369}" type="datetimeFigureOut">
               <a:rPr lang="ko-KR" altLang="en-US" smtClean="0"/>
-              <a:t>2026-07-09</a:t>
+              <a:t>2026-07-19</a:t>
             </a:fld>
             <a:endParaRPr lang="ko-KR" altLang="en-US"/>
           </a:p>
@@ -1951,7 +1961,7 @@
           <a:p>
             <a:fld id="{4EE28559-68A3-427A-B0AE-52D324B66369}" type="datetimeFigureOut">
               <a:rPr lang="ko-KR" altLang="en-US" smtClean="0"/>
-              <a:t>2026-07-09</a:t>
+              <a:t>2026-07-19</a:t>
             </a:fld>
             <a:endParaRPr lang="ko-KR" altLang="en-US"/>
           </a:p>
@@ -2064,7 +2074,7 @@
           <a:p>
             <a:fld id="{4EE28559-68A3-427A-B0AE-52D324B66369}" type="datetimeFigureOut">
               <a:rPr lang="ko-KR" altLang="en-US" smtClean="0"/>
-              <a:t>2026-07-09</a:t>
+              <a:t>2026-07-19</a:t>
             </a:fld>
             <a:endParaRPr lang="ko-KR" altLang="en-US"/>
           </a:p>
@@ -2375,7 +2385,7 @@
           <a:p>
             <a:fld id="{4EE28559-68A3-427A-B0AE-52D324B66369}" type="datetimeFigureOut">
               <a:rPr lang="ko-KR" altLang="en-US" smtClean="0"/>
-              <a:t>2026-07-09</a:t>
+              <a:t>2026-07-19</a:t>
             </a:fld>
             <a:endParaRPr lang="ko-KR" altLang="en-US"/>
           </a:p>
@@ -2663,7 +2673,7 @@
           <a:p>
             <a:fld id="{4EE28559-68A3-427A-B0AE-52D324B66369}" type="datetimeFigureOut">
               <a:rPr lang="ko-KR" altLang="en-US" smtClean="0"/>
-              <a:t>2026-07-09</a:t>
+              <a:t>2026-07-19</a:t>
             </a:fld>
             <a:endParaRPr lang="ko-KR" altLang="en-US"/>
           </a:p>
@@ -2904,7 +2914,7 @@
           <a:p>
             <a:fld id="{4EE28559-68A3-427A-B0AE-52D324B66369}" type="datetimeFigureOut">
               <a:rPr lang="ko-KR" altLang="en-US" smtClean="0"/>
-              <a:t>2026-07-09</a:t>
+              <a:t>2026-07-19</a:t>
             </a:fld>
             <a:endParaRPr lang="ko-KR" altLang="en-US"/>
           </a:p>
@@ -3335,8 +3345,8 @@
         </p:nvSpPr>
         <p:spPr>
           <a:xfrm>
-            <a:off x="360218" y="267855"/>
-            <a:ext cx="7112000" cy="369332"/>
+            <a:off x="3048000" y="1720840"/>
+            <a:ext cx="6096000" cy="3416320"/>
           </a:xfrm>
           <a:prstGeom prst="rect">
             <a:avLst/>
@@ -3349,9 +3359,183 @@
           </a:bodyPr>
           <a:lstStyle/>
           <a:p>
-            <a:r>
-              <a:rPr lang="ko-KR" altLang="en-US"/>
-              <a:t>ㅇ</a:t>
+            <a:pPr algn="ctr"/>
+            <a:r>
+              <a:rPr lang="en-US" altLang="ko-KR"/>
+              <a:t>pwd:</a:t>
+            </a:r>
+            <a:r>
+              <a:rPr lang="ko-KR" altLang="en-US"/>
+              <a:t> 현재 내 위치 확인</a:t>
+            </a:r>
+            <a:endParaRPr lang="en-US" altLang="ko-KR"/>
+          </a:p>
+          <a:p>
+            <a:pPr algn="ctr"/>
+            <a:r>
+              <a:rPr lang="en-US" altLang="ko-KR"/>
+              <a:t>ls: </a:t>
+            </a:r>
+            <a:r>
+              <a:rPr lang="ko-KR" altLang="en-US"/>
+              <a:t>현재 폴더에 있는 파일과 폴더 확인</a:t>
+            </a:r>
+            <a:endParaRPr lang="en-US" altLang="ko-KR"/>
+          </a:p>
+          <a:p>
+            <a:pPr algn="ctr"/>
+            <a:r>
+              <a:rPr lang="en-US" altLang="ko-KR"/>
+              <a:t>mkdir my-first-study: </a:t>
+            </a:r>
+            <a:r>
+              <a:rPr lang="ko-KR" altLang="en-US"/>
+              <a:t>폴더 생성</a:t>
+            </a:r>
+            <a:endParaRPr lang="en-US" altLang="ko-KR"/>
+          </a:p>
+          <a:p>
+            <a:pPr algn="ctr"/>
+            <a:r>
+              <a:rPr lang="en-US" altLang="ko-KR"/>
+              <a:t>cd my-first-study: </a:t>
+            </a:r>
+            <a:r>
+              <a:rPr lang="ko-KR" altLang="en-US"/>
+              <a:t>폴더 이동</a:t>
+            </a:r>
+            <a:endParaRPr lang="en-US" altLang="ko-KR"/>
+          </a:p>
+          <a:p>
+            <a:pPr algn="ctr"/>
+            <a:r>
+              <a:rPr lang="en-US" altLang="ko-KR"/>
+              <a:t>touch hello.txt: </a:t>
+            </a:r>
+            <a:r>
+              <a:rPr lang="ko-KR" altLang="en-US"/>
+              <a:t>파일 생성</a:t>
+            </a:r>
+            <a:r>
+              <a:rPr lang="en-US" altLang="ko-KR"/>
+              <a:t> </a:t>
+            </a:r>
+          </a:p>
+          <a:p>
+            <a:pPr algn="ctr"/>
+            <a:endParaRPr lang="en-US" altLang="ko-KR"/>
+          </a:p>
+          <a:p>
+            <a:pPr algn="ctr"/>
+            <a:r>
+              <a:rPr lang="en-US" altLang="ko-KR"/>
+              <a:t>vi hello.txt (</a:t>
+            </a:r>
+            <a:r>
+              <a:rPr lang="ko-KR" altLang="en-US"/>
+              <a:t>텍스트 편집 모드</a:t>
+            </a:r>
+            <a:r>
+              <a:rPr lang="en-US" altLang="ko-KR"/>
+              <a:t>)</a:t>
+            </a:r>
+          </a:p>
+          <a:p>
+            <a:pPr algn="ctr"/>
+            <a:r>
+              <a:rPr lang="en-US" altLang="ko-KR"/>
+              <a:t>i </a:t>
+            </a:r>
+            <a:r>
+              <a:rPr lang="ko-KR" altLang="en-US"/>
+              <a:t>누르면 </a:t>
+            </a:r>
+            <a:r>
+              <a:rPr lang="en-US" altLang="ko-KR"/>
+              <a:t>insert </a:t>
+            </a:r>
+            <a:r>
+              <a:rPr lang="ko-KR" altLang="en-US"/>
+              <a:t>모드로 변경 </a:t>
+            </a:r>
+            <a:r>
+              <a:rPr lang="en-US" altLang="ko-KR"/>
+              <a:t>(</a:t>
+            </a:r>
+            <a:r>
+              <a:rPr lang="ko-KR" altLang="en-US"/>
+              <a:t>처음볼 때는 보기 모드다</a:t>
+            </a:r>
+            <a:r>
+              <a:rPr lang="en-US" altLang="ko-KR"/>
+              <a:t>.)</a:t>
+            </a:r>
+          </a:p>
+          <a:p>
+            <a:pPr algn="ctr"/>
+            <a:r>
+              <a:rPr lang="en-US" altLang="ko-KR"/>
+              <a:t>ESC </a:t>
+            </a:r>
+            <a:r>
+              <a:rPr lang="ko-KR" altLang="en-US"/>
+              <a:t>키 누르고 입력 종료</a:t>
+            </a:r>
+            <a:endParaRPr lang="en-US" altLang="ko-KR"/>
+          </a:p>
+          <a:p>
+            <a:pPr algn="ctr"/>
+            <a:r>
+              <a:rPr lang="en-US" altLang="ko-KR"/>
+              <a:t>:wq </a:t>
+            </a:r>
+            <a:r>
+              <a:rPr lang="ko-KR" altLang="en-US"/>
+              <a:t>입력 후 </a:t>
+            </a:r>
+            <a:r>
+              <a:rPr lang="en-US" altLang="ko-KR"/>
+              <a:t>enter </a:t>
+            </a:r>
+            <a:r>
+              <a:rPr lang="ko-KR" altLang="en-US"/>
+              <a:t>입력</a:t>
+            </a:r>
+            <a:endParaRPr lang="en-US" altLang="ko-KR"/>
+          </a:p>
+          <a:p>
+            <a:pPr algn="ctr"/>
+            <a:endParaRPr lang="en-US" altLang="ko-KR"/>
+          </a:p>
+          <a:p>
+            <a:pPr algn="ctr"/>
+            <a:r>
+              <a:rPr lang="en-US" altLang="ko-KR"/>
+              <a:t>cat</a:t>
+            </a:r>
+            <a:r>
+              <a:rPr lang="ko-KR" altLang="en-US"/>
+              <a:t> </a:t>
+            </a:r>
+            <a:r>
+              <a:rPr lang="en-US" altLang="ko-KR"/>
+              <a:t>hello.txt</a:t>
+            </a:r>
+            <a:r>
+              <a:rPr lang="ko-KR" altLang="en-US"/>
+              <a:t> </a:t>
+            </a:r>
+            <a:r>
+              <a:rPr lang="en-US" altLang="ko-KR"/>
+              <a:t>(</a:t>
+            </a:r>
+            <a:r>
+              <a:rPr lang="ko-KR" altLang="en-US"/>
+              <a:t>파일 내용 확인</a:t>
+            </a:r>
+            <a:r>
+              <a:rPr lang="en-US" altLang="ko-KR"/>
+              <a:t>)</a:t>
             </a:r>
           </a:p>
         </p:txBody>
@@ -3360,6 +3544,1531 @@
     <p:extLst>
       <p:ext uri="{BB962C8B-B14F-4D97-AF65-F5344CB8AC3E}">
         <p14:creationId xmlns:p14="http://schemas.microsoft.com/office/powerpoint/2010/main" val="1421879101"/>
+      </p:ext>
+    </p:extLst>
+  </p:cSld>
+  <p:clrMapOvr>
+    <a:masterClrMapping/>
+  </p:clrMapOvr>
+</p:sld>
+</file>
+
+<file path=ppt/slides/slide2.xml><?xml version="1.0" encoding="utf-8"?>
+<p:sld xmlns:a="http://schemas.openxmlformats.org/drawingml/2006/main" xmlns:r="http://schemas.openxmlformats.org/officeDocument/2006/relationships" xmlns:p="http://schemas.openxmlformats.org/presentationml/2006/main">
+  <p:cSld>
+    <p:spTree>
+      <p:nvGrpSpPr>
+        <p:cNvPr id="1" name="">
+          <a:extLst>
+            <a:ext uri="{FF2B5EF4-FFF2-40B4-BE49-F238E27FC236}">
+              <a16:creationId xmlns:a16="http://schemas.microsoft.com/office/drawing/2014/main" id="{D8BBBD1F-D708-43DC-7C8A-5B21A4884B26}"/>
+            </a:ext>
+          </a:extLst>
+        </p:cNvPr>
+        <p:cNvGrpSpPr/>
+        <p:nvPr/>
+      </p:nvGrpSpPr>
+      <p:grpSpPr>
+        <a:xfrm>
+          <a:off x="0" y="0"/>
+          <a:ext cx="0" cy="0"/>
+          <a:chOff x="0" y="0"/>
+          <a:chExt cx="0" cy="0"/>
+        </a:xfrm>
+      </p:grpSpPr>
+      <p:sp>
+        <p:nvSpPr>
+          <p:cNvPr id="4" name="TextBox 3">
+            <a:extLst>
+              <a:ext uri="{FF2B5EF4-FFF2-40B4-BE49-F238E27FC236}">
+                <a16:creationId xmlns:a16="http://schemas.microsoft.com/office/drawing/2014/main" id="{BED73E25-AB90-7DD7-632C-49E046D7F6ED}"/>
+              </a:ext>
+            </a:extLst>
+          </p:cNvPr>
+          <p:cNvSpPr txBox="1"/>
+          <p:nvPr/>
+        </p:nvSpPr>
+        <p:spPr>
+          <a:xfrm>
+            <a:off x="0" y="12680"/>
+            <a:ext cx="12192000" cy="6463308"/>
+          </a:xfrm>
+          <a:prstGeom prst="rect">
+            <a:avLst/>
+          </a:prstGeom>
+          <a:noFill/>
+        </p:spPr>
+        <p:txBody>
+          <a:bodyPr wrap="square" rtlCol="0">
+            <a:spAutoFit/>
+          </a:bodyPr>
+          <a:lstStyle/>
+          <a:p>
+            <a:r>
+              <a:rPr lang="en-US" altLang="ko-KR"/>
+              <a:t>top: </a:t>
+            </a:r>
+            <a:r>
+              <a:rPr lang="ko-KR" altLang="en-US"/>
+              <a:t>리눅스에서 어떤 프로그램이 </a:t>
+            </a:r>
+            <a:r>
+              <a:rPr lang="en-US" altLang="ko-KR"/>
+              <a:t>CPU</a:t>
+            </a:r>
+            <a:r>
+              <a:rPr lang="ko-KR" altLang="en-US"/>
+              <a:t>를 얼마나 쓰고 있는지 알려주는 명령어 </a:t>
+            </a:r>
+            <a:r>
+              <a:rPr lang="en-US" altLang="ko-KR"/>
+              <a:t>(</a:t>
+            </a:r>
+            <a:r>
+              <a:rPr lang="ko-KR" altLang="en-US"/>
+              <a:t>나갈 때 </a:t>
+            </a:r>
+            <a:r>
+              <a:rPr lang="en-US" altLang="ko-KR"/>
+              <a:t>q </a:t>
+            </a:r>
+            <a:r>
+              <a:rPr lang="ko-KR" altLang="en-US"/>
+              <a:t>입력</a:t>
+            </a:r>
+            <a:r>
+              <a:rPr lang="en-US" altLang="ko-KR"/>
+              <a:t>)</a:t>
+            </a:r>
+          </a:p>
+          <a:p>
+            <a:endParaRPr lang="en-US" altLang="ko-KR"/>
+          </a:p>
+          <a:p>
+            <a:r>
+              <a:rPr lang="en-US" altLang="ko-KR"/>
+              <a:t>top - 20:15:45 up 16 min, 1 user, load average: 0.00, 0.01, 0.02</a:t>
+            </a:r>
+          </a:p>
+          <a:p>
+            <a:r>
+              <a:rPr lang="en-US" altLang="ko-KR"/>
+              <a:t>(up 16 min, </a:t>
+            </a:r>
+            <a:r>
+              <a:rPr lang="ko-KR" altLang="en-US"/>
+              <a:t>서버 켜진 지 </a:t>
+            </a:r>
+            <a:r>
+              <a:rPr lang="en-US" altLang="ko-KR"/>
+              <a:t>16</a:t>
+            </a:r>
+            <a:r>
+              <a:rPr lang="ko-KR" altLang="en-US"/>
+              <a:t>분 됐다는 뜻</a:t>
+            </a:r>
+            <a:r>
+              <a:rPr lang="en-US" altLang="ko-KR"/>
+              <a:t>)</a:t>
+            </a:r>
+          </a:p>
+          <a:p>
+            <a:r>
+              <a:rPr lang="en-US" altLang="ko-KR"/>
+              <a:t>(load average, CPU</a:t>
+            </a:r>
+            <a:r>
+              <a:rPr lang="ko-KR" altLang="en-US"/>
+              <a:t>가 처리해주기를 기다리는 프로세스의 개수</a:t>
+            </a:r>
+            <a:endParaRPr lang="en-US" altLang="ko-KR"/>
+          </a:p>
+          <a:p>
+            <a:r>
+              <a:rPr lang="en-US" altLang="ko-KR"/>
+              <a:t>1</a:t>
+            </a:r>
+            <a:r>
+              <a:rPr lang="ko-KR" altLang="en-US"/>
+              <a:t>분전</a:t>
+            </a:r>
+            <a:r>
+              <a:rPr lang="en-US" altLang="ko-KR"/>
+              <a:t>, 5</a:t>
+            </a:r>
+            <a:r>
+              <a:rPr lang="ko-KR" altLang="en-US"/>
+              <a:t>분전</a:t>
+            </a:r>
+            <a:r>
+              <a:rPr lang="en-US" altLang="ko-KR"/>
+              <a:t>, 15</a:t>
+            </a:r>
+            <a:r>
+              <a:rPr lang="ko-KR" altLang="en-US"/>
+              <a:t>분전을 의미한다</a:t>
+            </a:r>
+            <a:r>
+              <a:rPr lang="en-US" altLang="ko-KR"/>
+              <a:t>.)</a:t>
+            </a:r>
+          </a:p>
+          <a:p>
+            <a:endParaRPr lang="en-US" altLang="ko-KR"/>
+          </a:p>
+          <a:p>
+            <a:r>
+              <a:rPr lang="en-US" altLang="ko-KR"/>
+              <a:t>%Cpu(s):  0.0 us,  0.0 sy,  0.0 ni,100.0 id,  0.0 wa,  0.0 hi,  0.0 si,  0.0 st</a:t>
+            </a:r>
+          </a:p>
+          <a:p>
+            <a:endParaRPr lang="en-US" altLang="ko-KR"/>
+          </a:p>
+          <a:p>
+            <a:r>
+              <a:rPr lang="en-US" altLang="ko-KR"/>
+              <a:t>us (user): </a:t>
+            </a:r>
+            <a:r>
+              <a:rPr lang="ko-KR" altLang="en-US"/>
+              <a:t>사용자가 실행한 프로그램이 </a:t>
+            </a:r>
+            <a:r>
+              <a:rPr lang="en-US" altLang="ko-KR"/>
+              <a:t>CPU</a:t>
+            </a:r>
+            <a:r>
+              <a:rPr lang="ko-KR" altLang="en-US"/>
+              <a:t>를 얼마나 쓰는지</a:t>
+            </a:r>
+            <a:r>
+              <a:rPr lang="en-US" altLang="ko-KR"/>
+              <a:t>.</a:t>
+            </a:r>
+          </a:p>
+          <a:p>
+            <a:r>
+              <a:rPr lang="en-US" altLang="ko-KR"/>
+              <a:t>sy (system): </a:t>
+            </a:r>
+            <a:r>
+              <a:rPr lang="ko-KR" altLang="en-US"/>
+              <a:t>리눅스 커널</a:t>
+            </a:r>
+            <a:r>
+              <a:rPr lang="en-US" altLang="ko-KR"/>
+              <a:t>(</a:t>
+            </a:r>
+            <a:r>
+              <a:rPr lang="ko-KR" altLang="en-US"/>
+              <a:t>운영체제 핵심</a:t>
+            </a:r>
+            <a:r>
+              <a:rPr lang="en-US" altLang="ko-KR"/>
+              <a:t>)</a:t>
+            </a:r>
+            <a:r>
+              <a:rPr lang="ko-KR" altLang="en-US"/>
+              <a:t>이 시스템 유지보수를 위해 얼마나 쓰는지</a:t>
+            </a:r>
+            <a:r>
+              <a:rPr lang="en-US" altLang="ko-KR"/>
+              <a:t>.</a:t>
+            </a:r>
+          </a:p>
+          <a:p>
+            <a:r>
+              <a:rPr lang="en-US" altLang="ko-KR"/>
+              <a:t>id (idle, 100.0): </a:t>
+            </a:r>
+            <a:r>
+              <a:rPr lang="ko-KR" altLang="en-US"/>
+              <a:t>가장 중요한 지표</a:t>
+            </a:r>
+            <a:r>
+              <a:rPr lang="en-US" altLang="ko-KR"/>
+              <a:t>! CPU</a:t>
+            </a:r>
+            <a:r>
+              <a:rPr lang="ko-KR" altLang="en-US"/>
+              <a:t>가 </a:t>
+            </a:r>
+            <a:r>
+              <a:rPr lang="en-US" altLang="ko-KR"/>
+              <a:t>100% </a:t>
+            </a:r>
+            <a:r>
+              <a:rPr lang="ko-KR" altLang="en-US"/>
+              <a:t>아무것도 안 하고 놀고 있다는 뜻이야</a:t>
+            </a:r>
+            <a:r>
+              <a:rPr lang="en-US" altLang="ko-KR"/>
+              <a:t>. </a:t>
+            </a:r>
+          </a:p>
+          <a:p>
+            <a:r>
+              <a:rPr lang="ko-KR" altLang="en-US"/>
+              <a:t>서버가 엄청나게 한가하다는 증거지</a:t>
+            </a:r>
+            <a:r>
+              <a:rPr lang="en-US" altLang="ko-KR"/>
+              <a:t>!</a:t>
+            </a:r>
+          </a:p>
+          <a:p>
+            <a:r>
+              <a:rPr lang="en-US" altLang="ko-KR"/>
+              <a:t>wa (wait): CPU</a:t>
+            </a:r>
+            <a:r>
+              <a:rPr lang="ko-KR" altLang="en-US"/>
+              <a:t>가 일을 하고 싶어도 </a:t>
+            </a:r>
+            <a:r>
+              <a:rPr lang="en-US" altLang="ko-KR"/>
+              <a:t>'</a:t>
+            </a:r>
+            <a:r>
+              <a:rPr lang="ko-KR" altLang="en-US"/>
+              <a:t>디스크</a:t>
+            </a:r>
+            <a:r>
+              <a:rPr lang="en-US" altLang="ko-KR"/>
+              <a:t>(SSD/HDD)</a:t>
+            </a:r>
+            <a:r>
+              <a:rPr lang="ko-KR" altLang="en-US"/>
+              <a:t>에서 데이터를 가져오느라</a:t>
+            </a:r>
+            <a:r>
+              <a:rPr lang="en-US" altLang="ko-KR"/>
+              <a:t>' </a:t>
+            </a:r>
+            <a:r>
+              <a:rPr lang="ko-KR" altLang="en-US"/>
+              <a:t>기다리는 시간</a:t>
+            </a:r>
+            <a:r>
+              <a:rPr lang="en-US" altLang="ko-KR"/>
+              <a:t>. </a:t>
+            </a:r>
+          </a:p>
+          <a:p>
+            <a:r>
+              <a:rPr lang="ko-KR" altLang="en-US"/>
+              <a:t>이게 높으면 서버가 엄청 느려져</a:t>
+            </a:r>
+            <a:r>
+              <a:rPr lang="en-US" altLang="ko-KR"/>
+              <a:t>.</a:t>
+            </a:r>
+          </a:p>
+          <a:p>
+            <a:endParaRPr lang="en-US" altLang="ko-KR"/>
+          </a:p>
+          <a:p>
+            <a:r>
+              <a:rPr lang="en-US" altLang="ko-KR"/>
+              <a:t>ni (nice, 0.0): </a:t>
+            </a:r>
+            <a:r>
+              <a:rPr lang="ko-KR" altLang="en-US"/>
+              <a:t>사용자 프로그램 중에서 </a:t>
+            </a:r>
+            <a:r>
+              <a:rPr lang="en-US" altLang="ko-KR"/>
+              <a:t>'</a:t>
+            </a:r>
+            <a:r>
+              <a:rPr lang="ko-KR" altLang="en-US"/>
+              <a:t>우선순위</a:t>
+            </a:r>
+            <a:r>
+              <a:rPr lang="en-US" altLang="ko-KR"/>
+              <a:t>(Nice</a:t>
+            </a:r>
+            <a:r>
+              <a:rPr lang="ko-KR" altLang="en-US"/>
+              <a:t>값</a:t>
+            </a:r>
+            <a:r>
+              <a:rPr lang="en-US" altLang="ko-KR"/>
+              <a:t>)'</a:t>
+            </a:r>
+            <a:r>
+              <a:rPr lang="ko-KR" altLang="en-US"/>
+              <a:t>가 조정된 프로그램이 사용하는 시간이야</a:t>
+            </a:r>
+            <a:r>
+              <a:rPr lang="en-US" altLang="ko-KR"/>
+              <a:t>.</a:t>
+            </a:r>
+          </a:p>
+          <a:p>
+            <a:endParaRPr lang="en-US" altLang="ko-KR"/>
+          </a:p>
+          <a:p>
+            <a:r>
+              <a:rPr lang="en-US" altLang="ko-KR"/>
+              <a:t>hi (hardware interrupt, 0.0): </a:t>
+            </a:r>
+            <a:r>
+              <a:rPr lang="ko-KR" altLang="en-US"/>
+              <a:t>하드웨어 장치</a:t>
+            </a:r>
+            <a:r>
+              <a:rPr lang="en-US" altLang="ko-KR"/>
+              <a:t>(</a:t>
+            </a:r>
+            <a:r>
+              <a:rPr lang="ko-KR" altLang="en-US"/>
+              <a:t>마우스</a:t>
+            </a:r>
+            <a:r>
+              <a:rPr lang="en-US" altLang="ko-KR"/>
+              <a:t>, </a:t>
+            </a:r>
+            <a:r>
+              <a:rPr lang="ko-KR" altLang="en-US"/>
+              <a:t>키보드</a:t>
+            </a:r>
+            <a:r>
+              <a:rPr lang="en-US" altLang="ko-KR"/>
+              <a:t>, </a:t>
+            </a:r>
+            <a:r>
+              <a:rPr lang="ko-KR" altLang="en-US"/>
+              <a:t>네트워크 카드 등</a:t>
+            </a:r>
+            <a:r>
+              <a:rPr lang="en-US" altLang="ko-KR"/>
+              <a:t>)</a:t>
+            </a:r>
+            <a:r>
+              <a:rPr lang="ko-KR" altLang="en-US"/>
+              <a:t>가 </a:t>
+            </a:r>
+            <a:endParaRPr lang="en-US" altLang="ko-KR"/>
+          </a:p>
+          <a:p>
+            <a:r>
+              <a:rPr lang="en-US" altLang="ko-KR"/>
+              <a:t>CPU</a:t>
+            </a:r>
+            <a:r>
+              <a:rPr lang="ko-KR" altLang="en-US"/>
+              <a:t>에 </a:t>
+            </a:r>
+            <a:r>
+              <a:rPr lang="en-US" altLang="ko-KR"/>
+              <a:t>"</a:t>
+            </a:r>
+            <a:r>
+              <a:rPr lang="ko-KR" altLang="en-US"/>
+              <a:t>나 일 좀 봐줘</a:t>
+            </a:r>
+            <a:r>
+              <a:rPr lang="en-US" altLang="ko-KR"/>
+              <a:t>!"</a:t>
+            </a:r>
+            <a:r>
+              <a:rPr lang="ko-KR" altLang="en-US"/>
+              <a:t>라고 긴급 호출하는 시간이야</a:t>
+            </a:r>
+            <a:r>
+              <a:rPr lang="en-US" altLang="ko-KR"/>
+              <a:t>.</a:t>
+            </a:r>
+          </a:p>
+          <a:p>
+            <a:endParaRPr lang="en-US" altLang="ko-KR"/>
+          </a:p>
+          <a:p>
+            <a:r>
+              <a:rPr lang="en-US" altLang="ko-KR"/>
+              <a:t>si (software interrupt, 0.0): </a:t>
+            </a:r>
+            <a:r>
+              <a:rPr lang="ko-KR" altLang="en-US"/>
+              <a:t>소프트웨어적으로 발생하는 인터럽트 처리 시간이야</a:t>
+            </a:r>
+            <a:r>
+              <a:rPr lang="en-US" altLang="ko-KR"/>
+              <a:t>. </a:t>
+            </a:r>
+          </a:p>
+          <a:p>
+            <a:r>
+              <a:rPr lang="en-US" altLang="ko-KR"/>
+              <a:t>(</a:t>
+            </a:r>
+            <a:r>
+              <a:rPr lang="ko-KR" altLang="en-US"/>
+              <a:t>주로 네트워크 패킷을 대량으로 처리할 때 올라가</a:t>
+            </a:r>
+            <a:r>
+              <a:rPr lang="en-US" altLang="ko-KR"/>
+              <a:t>.)</a:t>
+            </a:r>
+          </a:p>
+        </p:txBody>
+      </p:sp>
+    </p:spTree>
+    <p:extLst>
+      <p:ext uri="{BB962C8B-B14F-4D97-AF65-F5344CB8AC3E}">
+        <p14:creationId xmlns:p14="http://schemas.microsoft.com/office/powerpoint/2010/main" val="449405278"/>
+      </p:ext>
+    </p:extLst>
+  </p:cSld>
+  <p:clrMapOvr>
+    <a:masterClrMapping/>
+  </p:clrMapOvr>
+</p:sld>
+</file>
+
+<file path=ppt/slides/slide3.xml><?xml version="1.0" encoding="utf-8"?>
+<p:sld xmlns:a="http://schemas.openxmlformats.org/drawingml/2006/main" xmlns:r="http://schemas.openxmlformats.org/officeDocument/2006/relationships" xmlns:p="http://schemas.openxmlformats.org/presentationml/2006/main">
+  <p:cSld>
+    <p:spTree>
+      <p:nvGrpSpPr>
+        <p:cNvPr id="1" name="">
+          <a:extLst>
+            <a:ext uri="{FF2B5EF4-FFF2-40B4-BE49-F238E27FC236}">
+              <a16:creationId xmlns:a16="http://schemas.microsoft.com/office/drawing/2014/main" id="{428A1208-377B-79F8-D13F-AD6830D8C90A}"/>
+            </a:ext>
+          </a:extLst>
+        </p:cNvPr>
+        <p:cNvGrpSpPr/>
+        <p:nvPr/>
+      </p:nvGrpSpPr>
+      <p:grpSpPr>
+        <a:xfrm>
+          <a:off x="0" y="0"/>
+          <a:ext cx="0" cy="0"/>
+          <a:chOff x="0" y="0"/>
+          <a:chExt cx="0" cy="0"/>
+        </a:xfrm>
+      </p:grpSpPr>
+      <p:sp>
+        <p:nvSpPr>
+          <p:cNvPr id="4" name="TextBox 3">
+            <a:extLst>
+              <a:ext uri="{FF2B5EF4-FFF2-40B4-BE49-F238E27FC236}">
+                <a16:creationId xmlns:a16="http://schemas.microsoft.com/office/drawing/2014/main" id="{FEFD7AB9-E649-31F0-200D-06145809FA66}"/>
+              </a:ext>
+            </a:extLst>
+          </p:cNvPr>
+          <p:cNvSpPr txBox="1"/>
+          <p:nvPr/>
+        </p:nvSpPr>
+        <p:spPr>
+          <a:xfrm>
+            <a:off x="0" y="12680"/>
+            <a:ext cx="12192000" cy="6186309"/>
+          </a:xfrm>
+          <a:prstGeom prst="rect">
+            <a:avLst/>
+          </a:prstGeom>
+          <a:noFill/>
+        </p:spPr>
+        <p:txBody>
+          <a:bodyPr wrap="square" rtlCol="0">
+            <a:spAutoFit/>
+          </a:bodyPr>
+          <a:lstStyle/>
+          <a:p>
+            <a:r>
+              <a:rPr lang="en-US" altLang="ko-KR"/>
+              <a:t>st (steal, 0.0): </a:t>
+            </a:r>
+            <a:r>
+              <a:rPr lang="ko-KR" altLang="en-US"/>
+              <a:t>클라우드 환경에서만 나오는 아주 중요한 지표야</a:t>
+            </a:r>
+            <a:r>
+              <a:rPr lang="en-US" altLang="ko-KR"/>
+              <a:t>. </a:t>
+            </a:r>
+            <a:r>
+              <a:rPr lang="ko-KR" altLang="en-US"/>
+              <a:t>가상 머신</a:t>
+            </a:r>
+            <a:r>
+              <a:rPr lang="en-US" altLang="ko-KR"/>
+              <a:t>(VM)</a:t>
+            </a:r>
+            <a:r>
+              <a:rPr lang="ko-KR" altLang="en-US"/>
+              <a:t>을 빌려 쓰고 있다면</a:t>
+            </a:r>
+            <a:r>
+              <a:rPr lang="en-US" altLang="ko-KR"/>
+              <a:t>, </a:t>
+            </a:r>
+          </a:p>
+          <a:p>
+            <a:r>
+              <a:rPr lang="ko-KR" altLang="en-US"/>
+              <a:t>실제 물리 서버의 </a:t>
+            </a:r>
+            <a:r>
+              <a:rPr lang="en-US" altLang="ko-KR"/>
+              <a:t>CPU</a:t>
+            </a:r>
+            <a:r>
+              <a:rPr lang="ko-KR" altLang="en-US"/>
+              <a:t>를 다른 가상 머신이 채가서 내가 써야 할 </a:t>
+            </a:r>
+            <a:r>
+              <a:rPr lang="en-US" altLang="ko-KR"/>
+              <a:t>CPU</a:t>
+            </a:r>
+            <a:r>
+              <a:rPr lang="ko-KR" altLang="en-US"/>
+              <a:t>를 못 쓰고 빼앗긴 시간이야</a:t>
+            </a:r>
+            <a:r>
+              <a:rPr lang="en-US" altLang="ko-KR"/>
+              <a:t>.</a:t>
+            </a:r>
+          </a:p>
+          <a:p>
+            <a:endParaRPr lang="en-US" altLang="ko-KR"/>
+          </a:p>
+          <a:p>
+            <a:r>
+              <a:rPr lang="ko-KR" altLang="en-US"/>
+              <a:t>이게 높으면 </a:t>
+            </a:r>
+            <a:r>
+              <a:rPr lang="en-US" altLang="ko-KR"/>
+              <a:t>"</a:t>
+            </a:r>
+            <a:r>
+              <a:rPr lang="ko-KR" altLang="en-US"/>
+              <a:t>클라우드 서비스 제공자</a:t>
+            </a:r>
+            <a:r>
+              <a:rPr lang="en-US" altLang="ko-KR"/>
+              <a:t>(AWS, GCP </a:t>
+            </a:r>
+            <a:r>
+              <a:rPr lang="ko-KR" altLang="en-US"/>
+              <a:t>등</a:t>
+            </a:r>
+            <a:r>
+              <a:rPr lang="en-US" altLang="ko-KR"/>
+              <a:t>)</a:t>
+            </a:r>
+            <a:r>
+              <a:rPr lang="ko-KR" altLang="en-US"/>
+              <a:t>가 </a:t>
+            </a:r>
+            <a:r>
+              <a:rPr lang="en-US" altLang="ko-KR"/>
+              <a:t>CPU </a:t>
+            </a:r>
+            <a:r>
+              <a:rPr lang="ko-KR" altLang="en-US"/>
+              <a:t>자원을 충분히 안 주고 있다</a:t>
+            </a:r>
+            <a:r>
+              <a:rPr lang="en-US" altLang="ko-KR"/>
+              <a:t>"</a:t>
+            </a:r>
+            <a:r>
+              <a:rPr lang="ko-KR" altLang="en-US"/>
+              <a:t>는 뜻이라</a:t>
+            </a:r>
+            <a:r>
+              <a:rPr lang="en-US" altLang="ko-KR"/>
+              <a:t>, </a:t>
+            </a:r>
+          </a:p>
+          <a:p>
+            <a:r>
+              <a:rPr lang="ko-KR" altLang="en-US"/>
+              <a:t>엔지니어가 클라우드 업체에 항의하거나 서버 사양을 높여야 해</a:t>
+            </a:r>
+            <a:r>
+              <a:rPr lang="en-US" altLang="ko-KR"/>
+              <a:t>.</a:t>
+            </a:r>
+          </a:p>
+          <a:p>
+            <a:endParaRPr lang="en-US" altLang="ko-KR"/>
+          </a:p>
+          <a:p>
+            <a:r>
+              <a:rPr lang="en-US" altLang="ko-KR"/>
+              <a:t>MiB Mem : 3760.2 total, 3225.4 free, 379.6 used, 155.2 buff/cache</a:t>
+            </a:r>
+          </a:p>
+          <a:p>
+            <a:endParaRPr lang="en-US" altLang="ko-KR"/>
+          </a:p>
+          <a:p>
+            <a:r>
+              <a:rPr lang="en-US" altLang="ko-KR"/>
+              <a:t>total: </a:t>
+            </a:r>
+            <a:r>
+              <a:rPr lang="ko-KR" altLang="en-US"/>
+              <a:t>전체 램 용량</a:t>
+            </a:r>
+            <a:r>
+              <a:rPr lang="en-US" altLang="ko-KR"/>
+              <a:t>(</a:t>
+            </a:r>
+            <a:r>
+              <a:rPr lang="ko-KR" altLang="en-US"/>
+              <a:t>약 </a:t>
+            </a:r>
+            <a:r>
+              <a:rPr lang="en-US" altLang="ko-KR"/>
+              <a:t>3.7GB).</a:t>
+            </a:r>
+          </a:p>
+          <a:p>
+            <a:endParaRPr lang="en-US" altLang="ko-KR"/>
+          </a:p>
+          <a:p>
+            <a:r>
+              <a:rPr lang="en-US" altLang="ko-KR"/>
+              <a:t>free: </a:t>
+            </a:r>
+            <a:r>
+              <a:rPr lang="ko-KR" altLang="en-US"/>
+              <a:t>완전히 비어있는 램</a:t>
+            </a:r>
+            <a:r>
+              <a:rPr lang="en-US" altLang="ko-KR"/>
+              <a:t>(</a:t>
+            </a:r>
+            <a:r>
+              <a:rPr lang="ko-KR" altLang="en-US"/>
+              <a:t>약 </a:t>
+            </a:r>
+            <a:r>
+              <a:rPr lang="en-US" altLang="ko-KR"/>
+              <a:t>3.2GB).</a:t>
+            </a:r>
+          </a:p>
+          <a:p>
+            <a:endParaRPr lang="en-US" altLang="ko-KR"/>
+          </a:p>
+          <a:p>
+            <a:r>
+              <a:rPr lang="en-US" altLang="ko-KR"/>
+              <a:t>used: </a:t>
+            </a:r>
+            <a:r>
+              <a:rPr lang="ko-KR" altLang="en-US"/>
+              <a:t>현재 프로그램들이 쓰고 있는 램</a:t>
+            </a:r>
+            <a:r>
+              <a:rPr lang="en-US" altLang="ko-KR"/>
+              <a:t>(</a:t>
+            </a:r>
+            <a:r>
+              <a:rPr lang="ko-KR" altLang="en-US"/>
+              <a:t>약 </a:t>
+            </a:r>
+            <a:r>
+              <a:rPr lang="en-US" altLang="ko-KR"/>
+              <a:t>0.3GB).</a:t>
+            </a:r>
+          </a:p>
+          <a:p>
+            <a:endParaRPr lang="en-US" altLang="ko-KR"/>
+          </a:p>
+          <a:p>
+            <a:r>
+              <a:rPr lang="en-US" altLang="ko-KR"/>
+              <a:t>buff/cache: </a:t>
+            </a:r>
+            <a:r>
+              <a:rPr lang="ko-KR" altLang="en-US"/>
+              <a:t>리눅스가 속도를 높이려고 임시로 데이터를 올려둔 공간</a:t>
+            </a:r>
+            <a:r>
+              <a:rPr lang="en-US" altLang="ko-KR"/>
+              <a:t>. </a:t>
+            </a:r>
+          </a:p>
+          <a:p>
+            <a:r>
+              <a:rPr lang="ko-KR" altLang="en-US"/>
+              <a:t>나중에 램이 부족해지면 이쪽은 자동으로 삭제해서 자리를 마련해주니까</a:t>
+            </a:r>
+            <a:r>
+              <a:rPr lang="en-US" altLang="ko-KR"/>
+              <a:t>, </a:t>
+            </a:r>
+            <a:r>
+              <a:rPr lang="ko-KR" altLang="en-US"/>
+              <a:t>걱정할 필요 없어</a:t>
+            </a:r>
+            <a:r>
+              <a:rPr lang="en-US" altLang="ko-KR"/>
+              <a:t>.</a:t>
+            </a:r>
+          </a:p>
+          <a:p>
+            <a:endParaRPr lang="en-US" altLang="ko-KR"/>
+          </a:p>
+          <a:p>
+            <a:r>
+              <a:rPr lang="en-US" altLang="ko-KR"/>
+              <a:t>MiB Swap: 1024.0 total, 1024.0 free, 0.0 used</a:t>
+            </a:r>
+          </a:p>
+          <a:p>
+            <a:endParaRPr lang="en-US" altLang="ko-KR"/>
+          </a:p>
+          <a:p>
+            <a:r>
+              <a:rPr lang="en-US" altLang="ko-KR"/>
+              <a:t>Swap: </a:t>
+            </a:r>
+            <a:r>
+              <a:rPr lang="ko-KR" altLang="en-US"/>
+              <a:t>램 용량이 꽉 찼을 때</a:t>
+            </a:r>
+            <a:r>
+              <a:rPr lang="en-US" altLang="ko-KR"/>
+              <a:t>, </a:t>
+            </a:r>
+            <a:r>
+              <a:rPr lang="ko-KR" altLang="en-US"/>
+              <a:t>어쩔 수 없이 하드디스크의 일부를 램처럼 빌려 쓰는 공간이야</a:t>
+            </a:r>
+            <a:r>
+              <a:rPr lang="en-US" altLang="ko-KR"/>
+              <a:t>.</a:t>
+            </a:r>
+          </a:p>
+          <a:p>
+            <a:endParaRPr lang="en-US" altLang="ko-KR"/>
+          </a:p>
+          <a:p>
+            <a:r>
+              <a:rPr lang="ko-KR" altLang="en-US"/>
+              <a:t>지금 </a:t>
+            </a:r>
+            <a:r>
+              <a:rPr lang="en-US" altLang="ko-KR"/>
+              <a:t>0.0 used</a:t>
+            </a:r>
+            <a:r>
+              <a:rPr lang="ko-KR" altLang="en-US"/>
+              <a:t>라는 건</a:t>
+            </a:r>
+            <a:r>
+              <a:rPr lang="en-US" altLang="ko-KR"/>
+              <a:t>, "</a:t>
+            </a:r>
+            <a:r>
+              <a:rPr lang="ko-KR" altLang="en-US"/>
+              <a:t>램이 아주 넉넉해서 하드디스크까지 빌려 쓸 필요가 없다</a:t>
+            </a:r>
+            <a:r>
+              <a:rPr lang="en-US" altLang="ko-KR"/>
+              <a:t>"</a:t>
+            </a:r>
+            <a:r>
+              <a:rPr lang="ko-KR" altLang="en-US"/>
+              <a:t>는 아주 건강한 상태라는 뜻이야</a:t>
+            </a:r>
+            <a:r>
+              <a:rPr lang="en-US" altLang="ko-KR"/>
+              <a:t>.</a:t>
+            </a:r>
+          </a:p>
+        </p:txBody>
+      </p:sp>
+    </p:spTree>
+    <p:extLst>
+      <p:ext uri="{BB962C8B-B14F-4D97-AF65-F5344CB8AC3E}">
+        <p14:creationId xmlns:p14="http://schemas.microsoft.com/office/powerpoint/2010/main" val="759609269"/>
+      </p:ext>
+    </p:extLst>
+  </p:cSld>
+  <p:clrMapOvr>
+    <a:masterClrMapping/>
+  </p:clrMapOvr>
+</p:sld>
+</file>
+
+<file path=ppt/slides/slide4.xml><?xml version="1.0" encoding="utf-8"?>
+<p:sld xmlns:a="http://schemas.openxmlformats.org/drawingml/2006/main" xmlns:r="http://schemas.openxmlformats.org/officeDocument/2006/relationships" xmlns:p="http://schemas.openxmlformats.org/presentationml/2006/main">
+  <p:cSld>
+    <p:spTree>
+      <p:nvGrpSpPr>
+        <p:cNvPr id="1" name="">
+          <a:extLst>
+            <a:ext uri="{FF2B5EF4-FFF2-40B4-BE49-F238E27FC236}">
+              <a16:creationId xmlns:a16="http://schemas.microsoft.com/office/drawing/2014/main" id="{8EA7976E-2077-0938-70BA-C91C8F2D72F1}"/>
+            </a:ext>
+          </a:extLst>
+        </p:cNvPr>
+        <p:cNvGrpSpPr/>
+        <p:nvPr/>
+      </p:nvGrpSpPr>
+      <p:grpSpPr>
+        <a:xfrm>
+          <a:off x="0" y="0"/>
+          <a:ext cx="0" cy="0"/>
+          <a:chOff x="0" y="0"/>
+          <a:chExt cx="0" cy="0"/>
+        </a:xfrm>
+      </p:grpSpPr>
+      <p:sp>
+        <p:nvSpPr>
+          <p:cNvPr id="4" name="TextBox 3">
+            <a:extLst>
+              <a:ext uri="{FF2B5EF4-FFF2-40B4-BE49-F238E27FC236}">
+                <a16:creationId xmlns:a16="http://schemas.microsoft.com/office/drawing/2014/main" id="{3884D018-FBFA-1946-1DFB-C436F58055A6}"/>
+              </a:ext>
+            </a:extLst>
+          </p:cNvPr>
+          <p:cNvSpPr txBox="1"/>
+          <p:nvPr/>
+        </p:nvSpPr>
+        <p:spPr>
+          <a:xfrm>
+            <a:off x="0" y="12680"/>
+            <a:ext cx="12192000" cy="6186309"/>
+          </a:xfrm>
+          <a:prstGeom prst="rect">
+            <a:avLst/>
+          </a:prstGeom>
+          <a:noFill/>
+        </p:spPr>
+        <p:txBody>
+          <a:bodyPr wrap="square" rtlCol="0">
+            <a:spAutoFit/>
+          </a:bodyPr>
+          <a:lstStyle/>
+          <a:p>
+            <a:r>
+              <a:rPr lang="en-US" altLang="ko-KR"/>
+              <a:t>st (steal, 0.0): </a:t>
+            </a:r>
+            <a:r>
+              <a:rPr lang="ko-KR" altLang="en-US"/>
+              <a:t>클라우드 환경에서만 나오는 아주 중요한 지표야</a:t>
+            </a:r>
+            <a:r>
+              <a:rPr lang="en-US" altLang="ko-KR"/>
+              <a:t>. </a:t>
+            </a:r>
+            <a:r>
+              <a:rPr lang="ko-KR" altLang="en-US"/>
+              <a:t>가상 머신</a:t>
+            </a:r>
+            <a:r>
+              <a:rPr lang="en-US" altLang="ko-KR"/>
+              <a:t>(VM)</a:t>
+            </a:r>
+            <a:r>
+              <a:rPr lang="ko-KR" altLang="en-US"/>
+              <a:t>을 빌려 쓰고 있다면</a:t>
+            </a:r>
+            <a:r>
+              <a:rPr lang="en-US" altLang="ko-KR"/>
+              <a:t>, </a:t>
+            </a:r>
+          </a:p>
+          <a:p>
+            <a:r>
+              <a:rPr lang="ko-KR" altLang="en-US"/>
+              <a:t>실제 물리 서버의 </a:t>
+            </a:r>
+            <a:r>
+              <a:rPr lang="en-US" altLang="ko-KR"/>
+              <a:t>CPU</a:t>
+            </a:r>
+            <a:r>
+              <a:rPr lang="ko-KR" altLang="en-US"/>
+              <a:t>를 다른 가상 머신이 채가서 내가 써야 할 </a:t>
+            </a:r>
+            <a:r>
+              <a:rPr lang="en-US" altLang="ko-KR"/>
+              <a:t>CPU</a:t>
+            </a:r>
+            <a:r>
+              <a:rPr lang="ko-KR" altLang="en-US"/>
+              <a:t>를 못 쓰고 빼앗긴 시간이야</a:t>
+            </a:r>
+            <a:r>
+              <a:rPr lang="en-US" altLang="ko-KR"/>
+              <a:t>.</a:t>
+            </a:r>
+          </a:p>
+          <a:p>
+            <a:endParaRPr lang="en-US" altLang="ko-KR"/>
+          </a:p>
+          <a:p>
+            <a:r>
+              <a:rPr lang="ko-KR" altLang="en-US"/>
+              <a:t>이게 높으면 </a:t>
+            </a:r>
+            <a:r>
+              <a:rPr lang="en-US" altLang="ko-KR"/>
+              <a:t>"</a:t>
+            </a:r>
+            <a:r>
+              <a:rPr lang="ko-KR" altLang="en-US"/>
+              <a:t>클라우드 서비스 제공자</a:t>
+            </a:r>
+            <a:r>
+              <a:rPr lang="en-US" altLang="ko-KR"/>
+              <a:t>(AWS, GCP </a:t>
+            </a:r>
+            <a:r>
+              <a:rPr lang="ko-KR" altLang="en-US"/>
+              <a:t>등</a:t>
+            </a:r>
+            <a:r>
+              <a:rPr lang="en-US" altLang="ko-KR"/>
+              <a:t>)</a:t>
+            </a:r>
+            <a:r>
+              <a:rPr lang="ko-KR" altLang="en-US"/>
+              <a:t>가 </a:t>
+            </a:r>
+            <a:r>
+              <a:rPr lang="en-US" altLang="ko-KR"/>
+              <a:t>CPU </a:t>
+            </a:r>
+            <a:r>
+              <a:rPr lang="ko-KR" altLang="en-US"/>
+              <a:t>자원을 충분히 안 주고 있다</a:t>
+            </a:r>
+            <a:r>
+              <a:rPr lang="en-US" altLang="ko-KR"/>
+              <a:t>"</a:t>
+            </a:r>
+            <a:r>
+              <a:rPr lang="ko-KR" altLang="en-US"/>
+              <a:t>는 뜻이라</a:t>
+            </a:r>
+            <a:r>
+              <a:rPr lang="en-US" altLang="ko-KR"/>
+              <a:t>, </a:t>
+            </a:r>
+          </a:p>
+          <a:p>
+            <a:r>
+              <a:rPr lang="ko-KR" altLang="en-US"/>
+              <a:t>엔지니어가 클라우드 업체에 항의하거나 서버 사양을 높여야 해</a:t>
+            </a:r>
+            <a:r>
+              <a:rPr lang="en-US" altLang="ko-KR"/>
+              <a:t>.</a:t>
+            </a:r>
+          </a:p>
+          <a:p>
+            <a:endParaRPr lang="en-US" altLang="ko-KR"/>
+          </a:p>
+          <a:p>
+            <a:r>
+              <a:rPr lang="en-US" altLang="ko-KR"/>
+              <a:t>MiB Mem : 3760.2 total, 3225.4 free, 379.6 used, 155.2 buff/cache</a:t>
+            </a:r>
+          </a:p>
+          <a:p>
+            <a:endParaRPr lang="en-US" altLang="ko-KR"/>
+          </a:p>
+          <a:p>
+            <a:r>
+              <a:rPr lang="en-US" altLang="ko-KR"/>
+              <a:t>total: </a:t>
+            </a:r>
+            <a:r>
+              <a:rPr lang="ko-KR" altLang="en-US"/>
+              <a:t>전체 램 용량</a:t>
+            </a:r>
+            <a:r>
+              <a:rPr lang="en-US" altLang="ko-KR"/>
+              <a:t>(</a:t>
+            </a:r>
+            <a:r>
+              <a:rPr lang="ko-KR" altLang="en-US"/>
+              <a:t>약 </a:t>
+            </a:r>
+            <a:r>
+              <a:rPr lang="en-US" altLang="ko-KR"/>
+              <a:t>3.7GB).</a:t>
+            </a:r>
+          </a:p>
+          <a:p>
+            <a:endParaRPr lang="en-US" altLang="ko-KR"/>
+          </a:p>
+          <a:p>
+            <a:r>
+              <a:rPr lang="en-US" altLang="ko-KR"/>
+              <a:t>free: </a:t>
+            </a:r>
+            <a:r>
+              <a:rPr lang="ko-KR" altLang="en-US"/>
+              <a:t>완전히 비어있는 램</a:t>
+            </a:r>
+            <a:r>
+              <a:rPr lang="en-US" altLang="ko-KR"/>
+              <a:t>(</a:t>
+            </a:r>
+            <a:r>
+              <a:rPr lang="ko-KR" altLang="en-US"/>
+              <a:t>약 </a:t>
+            </a:r>
+            <a:r>
+              <a:rPr lang="en-US" altLang="ko-KR"/>
+              <a:t>3.2GB).</a:t>
+            </a:r>
+          </a:p>
+          <a:p>
+            <a:endParaRPr lang="en-US" altLang="ko-KR"/>
+          </a:p>
+          <a:p>
+            <a:r>
+              <a:rPr lang="en-US" altLang="ko-KR"/>
+              <a:t>used: </a:t>
+            </a:r>
+            <a:r>
+              <a:rPr lang="ko-KR" altLang="en-US"/>
+              <a:t>현재 프로그램들이 쓰고 있는 램</a:t>
+            </a:r>
+            <a:r>
+              <a:rPr lang="en-US" altLang="ko-KR"/>
+              <a:t>(</a:t>
+            </a:r>
+            <a:r>
+              <a:rPr lang="ko-KR" altLang="en-US"/>
+              <a:t>약 </a:t>
+            </a:r>
+            <a:r>
+              <a:rPr lang="en-US" altLang="ko-KR"/>
+              <a:t>0.3GB).</a:t>
+            </a:r>
+          </a:p>
+          <a:p>
+            <a:endParaRPr lang="en-US" altLang="ko-KR"/>
+          </a:p>
+          <a:p>
+            <a:r>
+              <a:rPr lang="en-US" altLang="ko-KR"/>
+              <a:t>buff/cache: </a:t>
+            </a:r>
+            <a:r>
+              <a:rPr lang="ko-KR" altLang="en-US"/>
+              <a:t>리눅스가 속도를 높이려고 임시로 데이터를 올려둔 공간</a:t>
+            </a:r>
+            <a:r>
+              <a:rPr lang="en-US" altLang="ko-KR"/>
+              <a:t>. </a:t>
+            </a:r>
+          </a:p>
+          <a:p>
+            <a:r>
+              <a:rPr lang="ko-KR" altLang="en-US"/>
+              <a:t>나중에 램이 부족해지면 이쪽은 자동으로 삭제해서 자리를 마련해주니까</a:t>
+            </a:r>
+            <a:r>
+              <a:rPr lang="en-US" altLang="ko-KR"/>
+              <a:t>, </a:t>
+            </a:r>
+            <a:r>
+              <a:rPr lang="ko-KR" altLang="en-US"/>
+              <a:t>걱정할 필요 없어</a:t>
+            </a:r>
+            <a:r>
+              <a:rPr lang="en-US" altLang="ko-KR"/>
+              <a:t>.</a:t>
+            </a:r>
+          </a:p>
+          <a:p>
+            <a:endParaRPr lang="en-US" altLang="ko-KR"/>
+          </a:p>
+          <a:p>
+            <a:r>
+              <a:rPr lang="en-US" altLang="ko-KR"/>
+              <a:t>MiB Swap: 1024.0 total, 1024.0 free, 0.0 used</a:t>
+            </a:r>
+          </a:p>
+          <a:p>
+            <a:endParaRPr lang="en-US" altLang="ko-KR"/>
+          </a:p>
+          <a:p>
+            <a:r>
+              <a:rPr lang="en-US" altLang="ko-KR"/>
+              <a:t>Swap: </a:t>
+            </a:r>
+            <a:r>
+              <a:rPr lang="ko-KR" altLang="en-US"/>
+              <a:t>램 용량이 꽉 찼을 때</a:t>
+            </a:r>
+            <a:r>
+              <a:rPr lang="en-US" altLang="ko-KR"/>
+              <a:t>, </a:t>
+            </a:r>
+            <a:r>
+              <a:rPr lang="ko-KR" altLang="en-US"/>
+              <a:t>어쩔 수 없이 하드디스크의 일부를 램처럼 빌려 쓰는 공간이야</a:t>
+            </a:r>
+            <a:r>
+              <a:rPr lang="en-US" altLang="ko-KR"/>
+              <a:t>.</a:t>
+            </a:r>
+          </a:p>
+          <a:p>
+            <a:endParaRPr lang="en-US" altLang="ko-KR"/>
+          </a:p>
+          <a:p>
+            <a:r>
+              <a:rPr lang="ko-KR" altLang="en-US"/>
+              <a:t>지금 </a:t>
+            </a:r>
+            <a:r>
+              <a:rPr lang="en-US" altLang="ko-KR"/>
+              <a:t>0.0 used</a:t>
+            </a:r>
+            <a:r>
+              <a:rPr lang="ko-KR" altLang="en-US"/>
+              <a:t>라는 건</a:t>
+            </a:r>
+            <a:r>
+              <a:rPr lang="en-US" altLang="ko-KR"/>
+              <a:t>, "</a:t>
+            </a:r>
+            <a:r>
+              <a:rPr lang="ko-KR" altLang="en-US"/>
+              <a:t>램이 아주 넉넉해서 하드디스크까지 빌려 쓸 필요가 없다</a:t>
+            </a:r>
+            <a:r>
+              <a:rPr lang="en-US" altLang="ko-KR"/>
+              <a:t>"</a:t>
+            </a:r>
+            <a:r>
+              <a:rPr lang="ko-KR" altLang="en-US"/>
+              <a:t>는 아주 건강한 상태라는 뜻이야</a:t>
+            </a:r>
+            <a:r>
+              <a:rPr lang="en-US" altLang="ko-KR"/>
+              <a:t>.</a:t>
+            </a:r>
+          </a:p>
+        </p:txBody>
+      </p:sp>
+    </p:spTree>
+    <p:extLst>
+      <p:ext uri="{BB962C8B-B14F-4D97-AF65-F5344CB8AC3E}">
+        <p14:creationId xmlns:p14="http://schemas.microsoft.com/office/powerpoint/2010/main" val="117301994"/>
+      </p:ext>
+    </p:extLst>
+  </p:cSld>
+  <p:clrMapOvr>
+    <a:masterClrMapping/>
+  </p:clrMapOvr>
+</p:sld>
+</file>
+
+<file path=ppt/slides/slide5.xml><?xml version="1.0" encoding="utf-8"?>
+<p:sld xmlns:a="http://schemas.openxmlformats.org/drawingml/2006/main" xmlns:r="http://schemas.openxmlformats.org/officeDocument/2006/relationships" xmlns:p="http://schemas.openxmlformats.org/presentationml/2006/main">
+  <p:cSld>
+    <p:spTree>
+      <p:nvGrpSpPr>
+        <p:cNvPr id="1" name="">
+          <a:extLst>
+            <a:ext uri="{FF2B5EF4-FFF2-40B4-BE49-F238E27FC236}">
+              <a16:creationId xmlns:a16="http://schemas.microsoft.com/office/drawing/2014/main" id="{7CDF84A0-0666-3E7A-EF8F-5BF6A339362C}"/>
+            </a:ext>
+          </a:extLst>
+        </p:cNvPr>
+        <p:cNvGrpSpPr/>
+        <p:nvPr/>
+      </p:nvGrpSpPr>
+      <p:grpSpPr>
+        <a:xfrm>
+          <a:off x="0" y="0"/>
+          <a:ext cx="0" cy="0"/>
+          <a:chOff x="0" y="0"/>
+          <a:chExt cx="0" cy="0"/>
+        </a:xfrm>
+      </p:grpSpPr>
+      <p:sp>
+        <p:nvSpPr>
+          <p:cNvPr id="4" name="TextBox 3">
+            <a:extLst>
+              <a:ext uri="{FF2B5EF4-FFF2-40B4-BE49-F238E27FC236}">
+                <a16:creationId xmlns:a16="http://schemas.microsoft.com/office/drawing/2014/main" id="{16BA60C4-5E37-623B-2AA9-9A5CEB08BAD6}"/>
+              </a:ext>
+            </a:extLst>
+          </p:cNvPr>
+          <p:cNvSpPr txBox="1"/>
+          <p:nvPr/>
+        </p:nvSpPr>
+        <p:spPr>
+          <a:xfrm>
+            <a:off x="0" y="5121708"/>
+            <a:ext cx="12192000" cy="1200329"/>
+          </a:xfrm>
+          <a:prstGeom prst="rect">
+            <a:avLst/>
+          </a:prstGeom>
+          <a:noFill/>
+        </p:spPr>
+        <p:txBody>
+          <a:bodyPr wrap="square" rtlCol="0">
+            <a:spAutoFit/>
+          </a:bodyPr>
+          <a:lstStyle/>
+          <a:p>
+            <a:r>
+              <a:rPr lang="en-US" altLang="ko-KR"/>
+              <a:t>PID (process ID), USER</a:t>
+            </a:r>
+            <a:r>
+              <a:rPr lang="ko-KR" altLang="en-US"/>
+              <a:t> </a:t>
+            </a:r>
+            <a:r>
+              <a:rPr lang="en-US" altLang="ko-KR"/>
+              <a:t>(root</a:t>
+            </a:r>
+            <a:r>
+              <a:rPr lang="ko-KR" altLang="en-US"/>
+              <a:t>는 시스템 관리자 계정</a:t>
+            </a:r>
+            <a:r>
+              <a:rPr lang="en-US" altLang="ko-KR"/>
+              <a:t>, system+, syslog </a:t>
+            </a:r>
+            <a:r>
+              <a:rPr lang="ko-KR" altLang="en-US"/>
+              <a:t>운영체제 기능을 담당하는 전용 계정</a:t>
+            </a:r>
+            <a:r>
+              <a:rPr lang="en-US" altLang="ko-KR"/>
+              <a:t>)</a:t>
+            </a:r>
+          </a:p>
+          <a:p>
+            <a:r>
+              <a:rPr lang="en-US" altLang="ko-KR"/>
+              <a:t>COMMAND (</a:t>
+            </a:r>
+            <a:r>
+              <a:rPr lang="ko-KR" altLang="en-US"/>
+              <a:t>실행된 프로그램의 이름</a:t>
+            </a:r>
+            <a:r>
+              <a:rPr lang="en-US" altLang="ko-KR"/>
+              <a:t>), </a:t>
+            </a:r>
+          </a:p>
+          <a:p>
+            <a:r>
+              <a:rPr lang="en-US" altLang="ko-KR"/>
+              <a:t>VIRT (Virtual Memory), RES(resident Memory, </a:t>
+            </a:r>
+            <a:r>
+              <a:rPr lang="ko-KR" altLang="en-US"/>
+              <a:t>실제 </a:t>
+            </a:r>
+            <a:r>
+              <a:rPr lang="en-US" altLang="ko-KR"/>
+              <a:t>RAM</a:t>
+            </a:r>
+            <a:r>
+              <a:rPr lang="ko-KR" altLang="en-US"/>
+              <a:t>을 차지하는 메모리 크기</a:t>
+            </a:r>
+            <a:r>
+              <a:rPr lang="en-US" altLang="ko-KR"/>
+              <a:t>)</a:t>
+            </a:r>
+          </a:p>
+          <a:p>
+            <a:r>
+              <a:rPr lang="en-US" altLang="ko-KR"/>
+              <a:t>SHR (Shared Memory, </a:t>
+            </a:r>
+            <a:r>
+              <a:rPr lang="ko-KR" altLang="en-US"/>
+              <a:t>다른 프로그램과 공유해서 쓰는 메모리</a:t>
+            </a:r>
+            <a:r>
+              <a:rPr lang="en-US" altLang="ko-KR"/>
+              <a:t>)</a:t>
+            </a:r>
+          </a:p>
+        </p:txBody>
+      </p:sp>
+      <p:pic>
+        <p:nvPicPr>
+          <p:cNvPr id="3" name="그림 2">
+            <a:extLst>
+              <a:ext uri="{FF2B5EF4-FFF2-40B4-BE49-F238E27FC236}">
+                <a16:creationId xmlns:a16="http://schemas.microsoft.com/office/drawing/2014/main" id="{128612A4-EA8F-0274-7A61-8B9728DC6AE9}"/>
+              </a:ext>
+            </a:extLst>
+          </p:cNvPr>
+          <p:cNvPicPr>
+            <a:picLocks noChangeAspect="1"/>
+          </p:cNvPicPr>
+          <p:nvPr/>
+        </p:nvPicPr>
+        <p:blipFill>
+          <a:blip r:embed="rId2"/>
+          <a:stretch>
+            <a:fillRect/>
+          </a:stretch>
+        </p:blipFill>
+        <p:spPr>
+          <a:xfrm>
+            <a:off x="1940988" y="158070"/>
+            <a:ext cx="7497221" cy="4744112"/>
+          </a:xfrm>
+          <a:prstGeom prst="rect">
+            <a:avLst/>
+          </a:prstGeom>
+        </p:spPr>
+      </p:pic>
+    </p:spTree>
+    <p:extLst>
+      <p:ext uri="{BB962C8B-B14F-4D97-AF65-F5344CB8AC3E}">
+        <p14:creationId xmlns:p14="http://schemas.microsoft.com/office/powerpoint/2010/main" val="3234007886"/>
+      </p:ext>
+    </p:extLst>
+  </p:cSld>
+  <p:clrMapOvr>
+    <a:masterClrMapping/>
+  </p:clrMapOvr>
+</p:sld>
+</file>
+
+<file path=ppt/slides/slide6.xml><?xml version="1.0" encoding="utf-8"?>
+<p:sld xmlns:a="http://schemas.openxmlformats.org/drawingml/2006/main" xmlns:r="http://schemas.openxmlformats.org/officeDocument/2006/relationships" xmlns:p="http://schemas.openxmlformats.org/presentationml/2006/main">
+  <p:cSld>
+    <p:spTree>
+      <p:nvGrpSpPr>
+        <p:cNvPr id="1" name=""/>
+        <p:cNvGrpSpPr/>
+        <p:nvPr/>
+      </p:nvGrpSpPr>
+      <p:grpSpPr>
+        <a:xfrm>
+          <a:off x="0" y="0"/>
+          <a:ext cx="0" cy="0"/>
+          <a:chOff x="0" y="0"/>
+          <a:chExt cx="0" cy="0"/>
+        </a:xfrm>
+      </p:grpSpPr>
+      <p:sp>
+        <p:nvSpPr>
+          <p:cNvPr id="4" name="TextBox 3">
+            <a:extLst>
+              <a:ext uri="{FF2B5EF4-FFF2-40B4-BE49-F238E27FC236}">
+                <a16:creationId xmlns:a16="http://schemas.microsoft.com/office/drawing/2014/main" id="{E1871FEE-7D59-27B2-DEAF-B76B476D79E4}"/>
+              </a:ext>
+            </a:extLst>
+          </p:cNvPr>
+          <p:cNvSpPr txBox="1"/>
+          <p:nvPr/>
+        </p:nvSpPr>
+        <p:spPr>
+          <a:xfrm>
+            <a:off x="0" y="0"/>
+            <a:ext cx="11925300" cy="2862322"/>
+          </a:xfrm>
+          <a:prstGeom prst="rect">
+            <a:avLst/>
+          </a:prstGeom>
+          <a:noFill/>
+        </p:spPr>
+        <p:txBody>
+          <a:bodyPr wrap="square">
+            <a:spAutoFit/>
+          </a:bodyPr>
+          <a:lstStyle/>
+          <a:p>
+            <a:r>
+              <a:rPr lang="ko-KR" altLang="en-US"/>
+              <a:t>PR (Priority) / NI (Nice): 이 작업이 얼마나 중요한지 나타내는 수치야. 숫자가 낮을수록 우선순위가 높아서 CPU를 먼저 선점해. (일반적으로는 20/0으로 다 똑같아.)</a:t>
+            </a:r>
+          </a:p>
+          <a:p>
+            <a:endParaRPr lang="ko-KR" altLang="en-US"/>
+          </a:p>
+          <a:p>
+            <a:r>
+              <a:rPr lang="ko-KR" altLang="en-US"/>
+              <a:t>%CPU: 이 프로세스가 지금 CPU를 얼마나 쓰고 있나?</a:t>
+            </a:r>
+          </a:p>
+          <a:p>
+            <a:endParaRPr lang="ko-KR" altLang="en-US"/>
+          </a:p>
+          <a:p>
+            <a:r>
+              <a:rPr lang="ko-KR" altLang="en-US"/>
+              <a:t>%MEM: 이 프로세스가 전체 램 중 몇 %를 쓰고 있나? (예: snapd가 1.1%로 가장 많이 쓰고 있네.)</a:t>
+            </a:r>
+          </a:p>
+          <a:p>
+            <a:endParaRPr lang="ko-KR" altLang="en-US"/>
+          </a:p>
+          <a:p>
+            <a:r>
+              <a:rPr lang="ko-KR" altLang="en-US"/>
+              <a:t>TIME+: 이 프로그램이 처음 시작된 이후 지금까지 총 몇 초 동안 CPU를 괴롭혔는지 알려주는 '총 업무 시간’이야.</a:t>
+            </a:r>
+            <a:endParaRPr lang="en-US" altLang="ko-KR"/>
+          </a:p>
+          <a:p>
+            <a:endParaRPr lang="en-US" altLang="ko-KR"/>
+          </a:p>
+          <a:p>
+            <a:r>
+              <a:rPr lang="en-US" altLang="ko-KR"/>
+              <a:t>S: </a:t>
+            </a:r>
+            <a:r>
+              <a:rPr lang="ko-KR" altLang="en-US"/>
+              <a:t>전부 </a:t>
+            </a:r>
+            <a:r>
+              <a:rPr lang="en-US" altLang="ko-KR"/>
+              <a:t>sleeping </a:t>
+            </a:r>
+            <a:r>
+              <a:rPr lang="ko-KR" altLang="en-US"/>
+              <a:t>상태</a:t>
+            </a:r>
+            <a:r>
+              <a:rPr lang="en-US" altLang="ko-KR"/>
+              <a:t>, s</a:t>
+            </a:r>
+            <a:r>
+              <a:rPr lang="ko-KR" altLang="en-US"/>
+              <a:t>면 잠자는 중</a:t>
+            </a:r>
+            <a:r>
+              <a:rPr lang="en-US" altLang="ko-KR"/>
+              <a:t>.</a:t>
+            </a:r>
+            <a:endParaRPr lang="ko-KR" altLang="en-US"/>
+          </a:p>
+        </p:txBody>
+      </p:sp>
+    </p:spTree>
+    <p:extLst>
+      <p:ext uri="{BB962C8B-B14F-4D97-AF65-F5344CB8AC3E}">
+        <p14:creationId xmlns:p14="http://schemas.microsoft.com/office/powerpoint/2010/main" val="359884461"/>
       </p:ext>
     </p:extLst>
   </p:cSld>

--- a/Linux/리눅스 공부.pptx
+++ b/Linux/리눅스 공부.pptx
@@ -11,6 +11,10 @@
     <p:sldId id="259" r:id="rId5"/>
     <p:sldId id="260" r:id="rId6"/>
     <p:sldId id="261" r:id="rId7"/>
+    <p:sldId id="262" r:id="rId8"/>
+    <p:sldId id="263" r:id="rId9"/>
+    <p:sldId id="264" r:id="rId10"/>
+    <p:sldId id="265" r:id="rId11"/>
   </p:sldIdLst>
   <p:sldSz cx="12192000" cy="6858000"/>
   <p:notesSz cx="6858000" cy="9144000"/>
@@ -264,7 +268,7 @@
           <a:p>
             <a:fld id="{4EE28559-68A3-427A-B0AE-52D324B66369}" type="datetimeFigureOut">
               <a:rPr lang="ko-KR" altLang="en-US" smtClean="0"/>
-              <a:t>2026-07-19</a:t>
+              <a:t>2026-07-20</a:t>
             </a:fld>
             <a:endParaRPr lang="ko-KR" altLang="en-US"/>
           </a:p>
@@ -462,7 +466,7 @@
           <a:p>
             <a:fld id="{4EE28559-68A3-427A-B0AE-52D324B66369}" type="datetimeFigureOut">
               <a:rPr lang="ko-KR" altLang="en-US" smtClean="0"/>
-              <a:t>2026-07-19</a:t>
+              <a:t>2026-07-20</a:t>
             </a:fld>
             <a:endParaRPr lang="ko-KR" altLang="en-US"/>
           </a:p>
@@ -670,7 +674,7 @@
           <a:p>
             <a:fld id="{4EE28559-68A3-427A-B0AE-52D324B66369}" type="datetimeFigureOut">
               <a:rPr lang="ko-KR" altLang="en-US" smtClean="0"/>
-              <a:t>2026-07-19</a:t>
+              <a:t>2026-07-20</a:t>
             </a:fld>
             <a:endParaRPr lang="ko-KR" altLang="en-US"/>
           </a:p>
@@ -868,7 +872,7 @@
           <a:p>
             <a:fld id="{4EE28559-68A3-427A-B0AE-52D324B66369}" type="datetimeFigureOut">
               <a:rPr lang="ko-KR" altLang="en-US" smtClean="0"/>
-              <a:t>2026-07-19</a:t>
+              <a:t>2026-07-20</a:t>
             </a:fld>
             <a:endParaRPr lang="ko-KR" altLang="en-US"/>
           </a:p>
@@ -1143,7 +1147,7 @@
           <a:p>
             <a:fld id="{4EE28559-68A3-427A-B0AE-52D324B66369}" type="datetimeFigureOut">
               <a:rPr lang="ko-KR" altLang="en-US" smtClean="0"/>
-              <a:t>2026-07-19</a:t>
+              <a:t>2026-07-20</a:t>
             </a:fld>
             <a:endParaRPr lang="ko-KR" altLang="en-US"/>
           </a:p>
@@ -1408,7 +1412,7 @@
           <a:p>
             <a:fld id="{4EE28559-68A3-427A-B0AE-52D324B66369}" type="datetimeFigureOut">
               <a:rPr lang="ko-KR" altLang="en-US" smtClean="0"/>
-              <a:t>2026-07-19</a:t>
+              <a:t>2026-07-20</a:t>
             </a:fld>
             <a:endParaRPr lang="ko-KR" altLang="en-US"/>
           </a:p>
@@ -1820,7 +1824,7 @@
           <a:p>
             <a:fld id="{4EE28559-68A3-427A-B0AE-52D324B66369}" type="datetimeFigureOut">
               <a:rPr lang="ko-KR" altLang="en-US" smtClean="0"/>
-              <a:t>2026-07-19</a:t>
+              <a:t>2026-07-20</a:t>
             </a:fld>
             <a:endParaRPr lang="ko-KR" altLang="en-US"/>
           </a:p>
@@ -1961,7 +1965,7 @@
           <a:p>
             <a:fld id="{4EE28559-68A3-427A-B0AE-52D324B66369}" type="datetimeFigureOut">
               <a:rPr lang="ko-KR" altLang="en-US" smtClean="0"/>
-              <a:t>2026-07-19</a:t>
+              <a:t>2026-07-20</a:t>
             </a:fld>
             <a:endParaRPr lang="ko-KR" altLang="en-US"/>
           </a:p>
@@ -2074,7 +2078,7 @@
           <a:p>
             <a:fld id="{4EE28559-68A3-427A-B0AE-52D324B66369}" type="datetimeFigureOut">
               <a:rPr lang="ko-KR" altLang="en-US" smtClean="0"/>
-              <a:t>2026-07-19</a:t>
+              <a:t>2026-07-20</a:t>
             </a:fld>
             <a:endParaRPr lang="ko-KR" altLang="en-US"/>
           </a:p>
@@ -2385,7 +2389,7 @@
           <a:p>
             <a:fld id="{4EE28559-68A3-427A-B0AE-52D324B66369}" type="datetimeFigureOut">
               <a:rPr lang="ko-KR" altLang="en-US" smtClean="0"/>
-              <a:t>2026-07-19</a:t>
+              <a:t>2026-07-20</a:t>
             </a:fld>
             <a:endParaRPr lang="ko-KR" altLang="en-US"/>
           </a:p>
@@ -2673,7 +2677,7 @@
           <a:p>
             <a:fld id="{4EE28559-68A3-427A-B0AE-52D324B66369}" type="datetimeFigureOut">
               <a:rPr lang="ko-KR" altLang="en-US" smtClean="0"/>
-              <a:t>2026-07-19</a:t>
+              <a:t>2026-07-20</a:t>
             </a:fld>
             <a:endParaRPr lang="ko-KR" altLang="en-US"/>
           </a:p>
@@ -2914,7 +2918,7 @@
           <a:p>
             <a:fld id="{4EE28559-68A3-427A-B0AE-52D324B66369}" type="datetimeFigureOut">
               <a:rPr lang="ko-KR" altLang="en-US" smtClean="0"/>
-              <a:t>2026-07-19</a:t>
+              <a:t>2026-07-20</a:t>
             </a:fld>
             <a:endParaRPr lang="ko-KR" altLang="en-US"/>
           </a:p>
@@ -3553,6 +3557,315 @@
 </p:sld>
 </file>
 
+<file path=ppt/slides/slide10.xml><?xml version="1.0" encoding="utf-8"?>
+<p:sld xmlns:a="http://schemas.openxmlformats.org/drawingml/2006/main" xmlns:r="http://schemas.openxmlformats.org/officeDocument/2006/relationships" xmlns:p="http://schemas.openxmlformats.org/presentationml/2006/main">
+  <p:cSld>
+    <p:spTree>
+      <p:nvGrpSpPr>
+        <p:cNvPr id="1" name="">
+          <a:extLst>
+            <a:ext uri="{FF2B5EF4-FFF2-40B4-BE49-F238E27FC236}">
+              <a16:creationId xmlns:a16="http://schemas.microsoft.com/office/drawing/2014/main" id="{D703940E-C211-8D36-C9A5-CD29F13875E1}"/>
+            </a:ext>
+          </a:extLst>
+        </p:cNvPr>
+        <p:cNvGrpSpPr/>
+        <p:nvPr/>
+      </p:nvGrpSpPr>
+      <p:grpSpPr>
+        <a:xfrm>
+          <a:off x="0" y="0"/>
+          <a:ext cx="0" cy="0"/>
+          <a:chOff x="0" y="0"/>
+          <a:chExt cx="0" cy="0"/>
+        </a:xfrm>
+      </p:grpSpPr>
+      <p:sp>
+        <p:nvSpPr>
+          <p:cNvPr id="3" name="TextBox 2">
+            <a:extLst>
+              <a:ext uri="{FF2B5EF4-FFF2-40B4-BE49-F238E27FC236}">
+                <a16:creationId xmlns:a16="http://schemas.microsoft.com/office/drawing/2014/main" id="{5BA29A52-53FA-6E9F-BB25-6E26376EE0A4}"/>
+              </a:ext>
+            </a:extLst>
+          </p:cNvPr>
+          <p:cNvSpPr txBox="1"/>
+          <p:nvPr/>
+        </p:nvSpPr>
+        <p:spPr>
+          <a:xfrm>
+            <a:off x="0" y="-1"/>
+            <a:ext cx="12192000" cy="5355312"/>
+          </a:xfrm>
+          <a:prstGeom prst="rect">
+            <a:avLst/>
+          </a:prstGeom>
+          <a:noFill/>
+        </p:spPr>
+        <p:txBody>
+          <a:bodyPr wrap="square">
+            <a:spAutoFit/>
+          </a:bodyPr>
+          <a:lstStyle/>
+          <a:p>
+            <a:r>
+              <a:rPr lang="ko-KR" altLang="en-US"/>
+              <a:t>로그 시스템</a:t>
+            </a:r>
+            <a:endParaRPr lang="en-US" altLang="ko-KR"/>
+          </a:p>
+          <a:p>
+            <a:endParaRPr lang="en-US" altLang="ko-KR"/>
+          </a:p>
+          <a:p>
+            <a:r>
+              <a:rPr lang="ko-KR" altLang="en-US"/>
+              <a:t>모든 로그는 </a:t>
+            </a:r>
+            <a:r>
+              <a:rPr lang="en-US" altLang="ko-KR"/>
+              <a:t>/var/log/</a:t>
+            </a:r>
+            <a:r>
+              <a:rPr lang="ko-KR" altLang="en-US"/>
+              <a:t>에 저장된다</a:t>
+            </a:r>
+            <a:r>
+              <a:rPr lang="en-US" altLang="ko-KR"/>
+              <a:t>.</a:t>
+            </a:r>
+          </a:p>
+          <a:p>
+            <a:r>
+              <a:rPr lang="en-US" altLang="ko-KR"/>
+              <a:t>syslog(or</a:t>
+            </a:r>
+            <a:r>
+              <a:rPr lang="ko-KR" altLang="en-US"/>
+              <a:t> </a:t>
+            </a:r>
+            <a:r>
+              <a:rPr lang="en-US" altLang="ko-KR"/>
+              <a:t>messages) </a:t>
+            </a:r>
+            <a:r>
+              <a:rPr lang="ko-KR" altLang="en-US"/>
+              <a:t>시스템 전반의 운영 기록</a:t>
+            </a:r>
+            <a:endParaRPr lang="en-US" altLang="ko-KR"/>
+          </a:p>
+          <a:p>
+            <a:r>
+              <a:rPr lang="en-US" altLang="ko-KR"/>
+              <a:t>auth.log </a:t>
+            </a:r>
+            <a:r>
+              <a:rPr lang="ko-KR" altLang="en-US"/>
+              <a:t>누가 로그인했는지</a:t>
+            </a:r>
+            <a:r>
+              <a:rPr lang="en-US" altLang="ko-KR"/>
+              <a:t>, sudo</a:t>
+            </a:r>
+            <a:r>
+              <a:rPr lang="ko-KR" altLang="en-US"/>
+              <a:t>를 사용했는지</a:t>
+            </a:r>
+            <a:r>
+              <a:rPr lang="en-US" altLang="ko-KR"/>
+              <a:t>(</a:t>
+            </a:r>
+            <a:r>
+              <a:rPr lang="ko-KR" altLang="en-US"/>
+              <a:t>보안 기록</a:t>
+            </a:r>
+            <a:r>
+              <a:rPr lang="en-US" altLang="ko-KR"/>
+              <a:t>)</a:t>
+            </a:r>
+          </a:p>
+          <a:p>
+            <a:r>
+              <a:rPr lang="en-US" altLang="ko-KR"/>
+              <a:t>kern.log </a:t>
+            </a:r>
+            <a:r>
+              <a:rPr lang="ko-KR" altLang="en-US"/>
+              <a:t>커널</a:t>
+            </a:r>
+            <a:r>
+              <a:rPr lang="en-US" altLang="ko-KR"/>
+              <a:t>(</a:t>
+            </a:r>
+            <a:r>
+              <a:rPr lang="ko-KR" altLang="en-US"/>
+              <a:t>운영체제의 심장</a:t>
+            </a:r>
+            <a:r>
+              <a:rPr lang="en-US" altLang="ko-KR"/>
+              <a:t>)</a:t>
+            </a:r>
+            <a:r>
+              <a:rPr lang="ko-KR" altLang="en-US"/>
+              <a:t>에서 발생한 에러 기록</a:t>
+            </a:r>
+            <a:endParaRPr lang="en-US" altLang="ko-KR"/>
+          </a:p>
+          <a:p>
+            <a:endParaRPr lang="en-US" altLang="ko-KR"/>
+          </a:p>
+          <a:p>
+            <a:r>
+              <a:rPr lang="ko-KR" altLang="en-US"/>
+              <a:t>로그 파일은 너무 크기 때문에</a:t>
+            </a:r>
+            <a:r>
+              <a:rPr lang="en-US" altLang="ko-KR"/>
+              <a:t>, cat</a:t>
+            </a:r>
+            <a:r>
+              <a:rPr lang="ko-KR" altLang="en-US"/>
+              <a:t>으로 전부 확인하면 힘들다</a:t>
+            </a:r>
+            <a:r>
+              <a:rPr lang="en-US" altLang="ko-KR"/>
+              <a:t>. </a:t>
+            </a:r>
+            <a:r>
+              <a:rPr lang="ko-KR" altLang="en-US"/>
+              <a:t>즉</a:t>
+            </a:r>
+            <a:r>
+              <a:rPr lang="en-US" altLang="ko-KR"/>
+              <a:t>, tail -f</a:t>
+            </a:r>
+            <a:r>
+              <a:rPr lang="ko-KR" altLang="en-US"/>
+              <a:t>를 사용한다</a:t>
+            </a:r>
+            <a:r>
+              <a:rPr lang="en-US" altLang="ko-KR"/>
+              <a:t>.</a:t>
+            </a:r>
+          </a:p>
+          <a:p>
+            <a:r>
+              <a:rPr lang="en-US" altLang="ko-KR"/>
+              <a:t>(-f (follow), </a:t>
+            </a:r>
+            <a:r>
+              <a:rPr lang="ko-KR" altLang="en-US"/>
+              <a:t>파일의 끝에 새로운 내용이 추가되면 실시간으로 화면에 출력해준다</a:t>
+            </a:r>
+            <a:r>
+              <a:rPr lang="en-US" altLang="ko-KR"/>
+              <a:t>.)</a:t>
+            </a:r>
+          </a:p>
+          <a:p>
+            <a:endParaRPr lang="en-US" altLang="ko-KR"/>
+          </a:p>
+          <a:p>
+            <a:r>
+              <a:rPr lang="ko-KR" altLang="en-US"/>
+              <a:t>또한</a:t>
+            </a:r>
+            <a:r>
+              <a:rPr lang="en-US" altLang="ko-KR"/>
+              <a:t>, SuperUser DO (</a:t>
+            </a:r>
+            <a:r>
+              <a:rPr lang="ko-KR" altLang="en-US"/>
+              <a:t>최고 관리자 권한으로 실행</a:t>
+            </a:r>
+            <a:r>
+              <a:rPr lang="en-US" altLang="ko-KR"/>
+              <a:t>)</a:t>
+            </a:r>
+          </a:p>
+          <a:p>
+            <a:endParaRPr lang="en-US" altLang="ko-KR"/>
+          </a:p>
+          <a:p>
+            <a:r>
+              <a:rPr lang="en-US" altLang="ko-KR"/>
+              <a:t>sudo tail /var/log/auth.log</a:t>
+            </a:r>
+          </a:p>
+          <a:p>
+            <a:r>
+              <a:rPr lang="ko-KR" altLang="en-US"/>
+              <a:t>리눅스는 사용자가 자고 있을 때도 스스로 관리 작업을 하며</a:t>
+            </a:r>
+            <a:r>
+              <a:rPr lang="en-US" altLang="ko-KR"/>
+              <a:t>, </a:t>
+            </a:r>
+            <a:r>
+              <a:rPr lang="ko-KR" altLang="en-US"/>
+              <a:t>모든 작업은 로그로 남는다</a:t>
+            </a:r>
+            <a:r>
+              <a:rPr lang="en-US" altLang="ko-KR"/>
+              <a:t>.</a:t>
+            </a:r>
+          </a:p>
+          <a:p>
+            <a:endParaRPr lang="en-US" altLang="ko-KR"/>
+          </a:p>
+          <a:p>
+            <a:r>
+              <a:rPr lang="en-US" altLang="ko-KR"/>
+              <a:t>sudo</a:t>
+            </a:r>
+            <a:r>
+              <a:rPr lang="ko-KR" altLang="en-US"/>
+              <a:t> </a:t>
+            </a:r>
+            <a:r>
+              <a:rPr lang="en-US" altLang="ko-KR"/>
+              <a:t>tail</a:t>
+            </a:r>
+            <a:r>
+              <a:rPr lang="ko-KR" altLang="en-US"/>
+              <a:t> </a:t>
+            </a:r>
+            <a:r>
+              <a:rPr lang="en-US" altLang="ko-KR"/>
+              <a:t>–f /var/log/syslog</a:t>
+            </a:r>
+          </a:p>
+          <a:p>
+            <a:r>
+              <a:rPr lang="ko-KR" altLang="en-US"/>
+              <a:t>시스템이 실시간으로 어떤 상태인지 로그로 보여준다</a:t>
+            </a:r>
+            <a:r>
+              <a:rPr lang="en-US" altLang="ko-KR"/>
+              <a:t>.</a:t>
+            </a:r>
+          </a:p>
+          <a:p>
+            <a:endParaRPr lang="en-US" altLang="ko-KR"/>
+          </a:p>
+          <a:p>
+            <a:endParaRPr lang="en-US" altLang="ko-KR"/>
+          </a:p>
+        </p:txBody>
+      </p:sp>
+    </p:spTree>
+    <p:extLst>
+      <p:ext uri="{BB962C8B-B14F-4D97-AF65-F5344CB8AC3E}">
+        <p14:creationId xmlns:p14="http://schemas.microsoft.com/office/powerpoint/2010/main" val="837218119"/>
+      </p:ext>
+    </p:extLst>
+  </p:cSld>
+  <p:clrMapOvr>
+    <a:masterClrMapping/>
+  </p:clrMapOvr>
+</p:sld>
+</file>
+
 <file path=ppt/slides/slide2.xml><?xml version="1.0" encoding="utf-8"?>
 <p:sld xmlns:a="http://schemas.openxmlformats.org/drawingml/2006/main" xmlns:r="http://schemas.openxmlformats.org/officeDocument/2006/relationships" xmlns:p="http://schemas.openxmlformats.org/presentationml/2006/main">
   <p:cSld>
@@ -3635,6 +3948,14 @@
             <a:r>
               <a:rPr lang="ko-KR" altLang="en-US"/>
               <a:t>입력</a:t>
+            </a:r>
+            <a:r>
+              <a:rPr lang="en-US" altLang="ko-KR"/>
+              <a:t>) (</a:t>
+            </a:r>
+            <a:r>
+              <a:rPr lang="ko-KR" altLang="en-US"/>
+              <a:t>이건 실시간</a:t>
             </a:r>
             <a:r>
               <a:rPr lang="en-US" altLang="ko-KR"/>
@@ -4983,7 +5304,7 @@
         <p:spPr>
           <a:xfrm>
             <a:off x="0" y="0"/>
-            <a:ext cx="11925300" cy="2862322"/>
+            <a:ext cx="11925300" cy="6740307"/>
           </a:xfrm>
           <a:prstGeom prst="rect">
             <a:avLst/>
@@ -5061,7 +5382,175 @@
               <a:rPr lang="en-US" altLang="ko-KR"/>
               <a:t>.</a:t>
             </a:r>
-            <a:endParaRPr lang="ko-KR" altLang="en-US"/>
+          </a:p>
+          <a:p>
+            <a:endParaRPr lang="en-US" altLang="ko-KR"/>
+          </a:p>
+          <a:p>
+            <a:r>
+              <a:rPr lang="it-IT" altLang="ko-KR"/>
+              <a:t>-rwxr-xr-x 1 dimo0121 dimo0121 17016 May 28 11:19 a.out</a:t>
+            </a:r>
+            <a:endParaRPr lang="en-US" altLang="ko-KR"/>
+          </a:p>
+          <a:p>
+            <a:endParaRPr lang="en-US" altLang="ko-KR"/>
+          </a:p>
+          <a:p>
+            <a:r>
+              <a:rPr lang="ko-KR" altLang="en-US"/>
+              <a:t>첫번째 유저</a:t>
+            </a:r>
+            <a:r>
+              <a:rPr lang="en-US" altLang="ko-KR"/>
+              <a:t>, </a:t>
+            </a:r>
+            <a:r>
+              <a:rPr lang="ko-KR" altLang="en-US"/>
+              <a:t>두번째 그룹</a:t>
+            </a:r>
+            <a:r>
+              <a:rPr lang="en-US" altLang="ko-KR"/>
+              <a:t>, </a:t>
+            </a:r>
+            <a:r>
+              <a:rPr lang="ko-KR" altLang="en-US"/>
+              <a:t>세번째 기타 사용자</a:t>
+            </a:r>
+            <a:endParaRPr lang="en-US" altLang="ko-KR"/>
+          </a:p>
+          <a:p>
+            <a:endParaRPr lang="en-US" altLang="ko-KR"/>
+          </a:p>
+          <a:p>
+            <a:r>
+              <a:rPr lang="en-US" altLang="ko-KR"/>
+              <a:t>ls</a:t>
+            </a:r>
+            <a:r>
+              <a:rPr lang="ko-KR" altLang="en-US"/>
+              <a:t> </a:t>
+            </a:r>
+            <a:r>
+              <a:rPr lang="en-US" altLang="ko-KR"/>
+              <a:t>–l</a:t>
+            </a:r>
+            <a:r>
+              <a:rPr lang="ko-KR" altLang="en-US"/>
+              <a:t>을 하면 현재 폴더에 존재하는 폴더 </a:t>
+            </a:r>
+            <a:r>
+              <a:rPr lang="en-US" altLang="ko-KR"/>
+              <a:t>and </a:t>
+            </a:r>
+            <a:r>
+              <a:rPr lang="ko-KR" altLang="en-US"/>
+              <a:t>파일들의 권한을 확인할 수 있음</a:t>
+            </a:r>
+            <a:r>
+              <a:rPr lang="en-US" altLang="ko-KR"/>
+              <a:t>.</a:t>
+            </a:r>
+          </a:p>
+          <a:p>
+            <a:r>
+              <a:rPr lang="ko-KR" altLang="en-US"/>
+              <a:t>기본적으로 파일은 </a:t>
+            </a:r>
+            <a:r>
+              <a:rPr lang="en-US" altLang="ko-KR"/>
+              <a:t>644</a:t>
+            </a:r>
+            <a:r>
+              <a:rPr lang="ko-KR" altLang="en-US"/>
+              <a:t>권한을 가지고 있다</a:t>
+            </a:r>
+            <a:r>
+              <a:rPr lang="en-US" altLang="ko-KR"/>
+              <a:t>.</a:t>
+            </a:r>
+          </a:p>
+          <a:p>
+            <a:endParaRPr lang="en-US" altLang="ko-KR"/>
+          </a:p>
+          <a:p>
+            <a:r>
+              <a:rPr lang="en-US" altLang="ko-KR"/>
+              <a:t>chmod</a:t>
+            </a:r>
+            <a:r>
+              <a:rPr lang="ko-KR" altLang="en-US"/>
+              <a:t> </a:t>
+            </a:r>
+            <a:r>
+              <a:rPr lang="en-US" altLang="ko-KR"/>
+              <a:t>444</a:t>
+            </a:r>
+            <a:r>
+              <a:rPr lang="ko-KR" altLang="en-US"/>
+              <a:t> </a:t>
+            </a:r>
+            <a:r>
+              <a:rPr lang="en-US" altLang="ko-KR"/>
+              <a:t>test.txt</a:t>
+            </a:r>
+            <a:r>
+              <a:rPr lang="ko-KR" altLang="en-US"/>
+              <a:t> </a:t>
+            </a:r>
+            <a:endParaRPr lang="en-US" altLang="ko-KR"/>
+          </a:p>
+          <a:p>
+            <a:r>
+              <a:rPr lang="en-US" altLang="ko-KR"/>
+              <a:t>chmod u+x test.txt</a:t>
+            </a:r>
+          </a:p>
+          <a:p>
+            <a:r>
+              <a:rPr lang="ko-KR" altLang="en-US"/>
+              <a:t>이렇게 하면 파일 권한 수정가능</a:t>
+            </a:r>
+            <a:r>
+              <a:rPr lang="en-US" altLang="ko-KR"/>
+              <a:t>. </a:t>
+            </a:r>
+          </a:p>
+          <a:p>
+            <a:r>
+              <a:rPr lang="en-US" altLang="ko-KR"/>
+              <a:t>(</a:t>
+            </a:r>
+            <a:r>
+              <a:rPr lang="ko-KR" altLang="en-US"/>
+              <a:t>또한</a:t>
+            </a:r>
+            <a:r>
+              <a:rPr lang="en-US" altLang="ko-KR"/>
+              <a:t>, </a:t>
+            </a:r>
+            <a:r>
+              <a:rPr lang="ko-KR" altLang="en-US"/>
+              <a:t>보통 실행파일은 초록색으로 보인다</a:t>
+            </a:r>
+            <a:r>
+              <a:rPr lang="en-US" altLang="ko-KR"/>
+              <a:t>. </a:t>
+            </a:r>
+            <a:r>
+              <a:rPr lang="ko-KR" altLang="en-US"/>
+              <a:t>디렉토리는 파란색이다</a:t>
+            </a:r>
+            <a:r>
+              <a:rPr lang="en-US" altLang="ko-KR"/>
+              <a:t>.)</a:t>
+            </a:r>
+          </a:p>
+          <a:p>
+            <a:endParaRPr lang="en-US" altLang="ko-KR"/>
+          </a:p>
+          <a:p>
+            <a:endParaRPr lang="en-US" altLang="ko-KR"/>
           </a:p>
         </p:txBody>
       </p:sp>
@@ -5069,6 +5558,852 @@
     <p:extLst>
       <p:ext uri="{BB962C8B-B14F-4D97-AF65-F5344CB8AC3E}">
         <p14:creationId xmlns:p14="http://schemas.microsoft.com/office/powerpoint/2010/main" val="359884461"/>
+      </p:ext>
+    </p:extLst>
+  </p:cSld>
+  <p:clrMapOvr>
+    <a:masterClrMapping/>
+  </p:clrMapOvr>
+</p:sld>
+</file>
+
+<file path=ppt/slides/slide7.xml><?xml version="1.0" encoding="utf-8"?>
+<p:sld xmlns:a="http://schemas.openxmlformats.org/drawingml/2006/main" xmlns:r="http://schemas.openxmlformats.org/officeDocument/2006/relationships" xmlns:p="http://schemas.openxmlformats.org/presentationml/2006/main">
+  <p:cSld>
+    <p:spTree>
+      <p:nvGrpSpPr>
+        <p:cNvPr id="1" name="">
+          <a:extLst>
+            <a:ext uri="{FF2B5EF4-FFF2-40B4-BE49-F238E27FC236}">
+              <a16:creationId xmlns:a16="http://schemas.microsoft.com/office/drawing/2014/main" id="{CCFD68AE-1AD4-02FA-512C-AE93C573B0A9}"/>
+            </a:ext>
+          </a:extLst>
+        </p:cNvPr>
+        <p:cNvGrpSpPr/>
+        <p:nvPr/>
+      </p:nvGrpSpPr>
+      <p:grpSpPr>
+        <a:xfrm>
+          <a:off x="0" y="0"/>
+          <a:ext cx="0" cy="0"/>
+          <a:chOff x="0" y="0"/>
+          <a:chExt cx="0" cy="0"/>
+        </a:xfrm>
+      </p:grpSpPr>
+      <p:sp>
+        <p:nvSpPr>
+          <p:cNvPr id="4" name="TextBox 3">
+            <a:extLst>
+              <a:ext uri="{FF2B5EF4-FFF2-40B4-BE49-F238E27FC236}">
+                <a16:creationId xmlns:a16="http://schemas.microsoft.com/office/drawing/2014/main" id="{302A8EB5-FADB-F536-63B6-C593E60452C1}"/>
+              </a:ext>
+            </a:extLst>
+          </p:cNvPr>
+          <p:cNvSpPr txBox="1"/>
+          <p:nvPr/>
+        </p:nvSpPr>
+        <p:spPr>
+          <a:xfrm>
+            <a:off x="0" y="0"/>
+            <a:ext cx="12192000" cy="3416320"/>
+          </a:xfrm>
+          <a:prstGeom prst="rect">
+            <a:avLst/>
+          </a:prstGeom>
+          <a:noFill/>
+        </p:spPr>
+        <p:txBody>
+          <a:bodyPr wrap="square">
+            <a:spAutoFit/>
+          </a:bodyPr>
+          <a:lstStyle/>
+          <a:p>
+            <a:r>
+              <a:rPr lang="en-US" altLang="ko-KR"/>
+              <a:t>sudo chown [</a:t>
+            </a:r>
+            <a:r>
+              <a:rPr lang="ko-KR" altLang="en-US"/>
+              <a:t>사용자명</a:t>
+            </a:r>
+            <a:r>
+              <a:rPr lang="en-US" altLang="ko-KR"/>
+              <a:t>] [</a:t>
+            </a:r>
+            <a:r>
+              <a:rPr lang="ko-KR" altLang="en-US"/>
+              <a:t>파일이름</a:t>
+            </a:r>
+            <a:r>
+              <a:rPr lang="en-US" altLang="ko-KR"/>
+              <a:t>]</a:t>
+            </a:r>
+          </a:p>
+          <a:p>
+            <a:r>
+              <a:rPr lang="en-US" altLang="ko-KR"/>
+              <a:t>sudo(root </a:t>
+            </a:r>
+            <a:r>
+              <a:rPr lang="ko-KR" altLang="en-US"/>
+              <a:t>권한으로 실행</a:t>
+            </a:r>
+            <a:r>
+              <a:rPr lang="en-US" altLang="ko-KR"/>
+              <a:t>, chown(change owner</a:t>
+            </a:r>
+            <a:r>
+              <a:rPr lang="ko-KR" altLang="en-US"/>
+              <a:t>의 줄임말</a:t>
+            </a:r>
+            <a:r>
+              <a:rPr lang="en-US" altLang="ko-KR"/>
+              <a:t>))</a:t>
+            </a:r>
+          </a:p>
+          <a:p>
+            <a:endParaRPr lang="en-US" altLang="ko-KR"/>
+          </a:p>
+          <a:p>
+            <a:r>
+              <a:rPr lang="en-US" altLang="ko-KR"/>
+              <a:t>cat /etc/passwd, </a:t>
+            </a:r>
+            <a:r>
+              <a:rPr lang="ko-KR" altLang="en-US"/>
+              <a:t>시스템에 존재하는 모든 사용자 계정 정보를 담고 있는 파일</a:t>
+            </a:r>
+            <a:r>
+              <a:rPr lang="en-US" altLang="ko-KR"/>
+              <a:t>.</a:t>
+            </a:r>
+          </a:p>
+          <a:p>
+            <a:endParaRPr lang="en-US" altLang="ko-KR"/>
+          </a:p>
+          <a:p>
+            <a:r>
+              <a:rPr lang="it-IT" altLang="ko-KR"/>
+              <a:t>dimo0121:x:1000:1000:,,,:/home/dimo0121:/bin/bash</a:t>
+            </a:r>
+            <a:endParaRPr lang="en-US" altLang="ko-KR"/>
+          </a:p>
+          <a:p>
+            <a:r>
+              <a:rPr lang="ko-KR" altLang="en-US"/>
+              <a:t>사용자이름</a:t>
+            </a:r>
+            <a:r>
+              <a:rPr lang="en-US" altLang="ko-KR"/>
+              <a:t>, x(</a:t>
+            </a:r>
+            <a:r>
+              <a:rPr lang="ko-KR" altLang="en-US"/>
+              <a:t>비밀번호 자리</a:t>
+            </a:r>
+            <a:r>
+              <a:rPr lang="en-US" altLang="ko-KR"/>
+              <a:t>), UID, GID, ,,,(</a:t>
+            </a:r>
+            <a:r>
+              <a:rPr lang="ko-KR" altLang="en-US"/>
+              <a:t>사용자 설명</a:t>
+            </a:r>
+            <a:r>
+              <a:rPr lang="en-US" altLang="ko-KR"/>
+              <a:t>), </a:t>
+            </a:r>
+            <a:r>
+              <a:rPr lang="ko-KR" altLang="en-US"/>
+              <a:t>홈 디렉토리</a:t>
+            </a:r>
+            <a:r>
+              <a:rPr lang="en-US" altLang="ko-KR"/>
+              <a:t>, Shell(</a:t>
+            </a:r>
+            <a:r>
+              <a:rPr lang="ko-KR" altLang="en-US"/>
+              <a:t>로그인했을 때 어떤 프로그램을 실행할지</a:t>
+            </a:r>
+            <a:r>
+              <a:rPr lang="en-US" altLang="ko-KR"/>
+              <a:t>.)</a:t>
+            </a:r>
+          </a:p>
+          <a:p>
+            <a:endParaRPr lang="en-US" altLang="ko-KR"/>
+          </a:p>
+          <a:p>
+            <a:r>
+              <a:rPr lang="en-US" altLang="ko-KR"/>
+              <a:t>www-data (</a:t>
+            </a:r>
+            <a:r>
+              <a:rPr lang="ko-KR" altLang="en-US"/>
+              <a:t>만약 누가 웹 서버를 해킹한다면</a:t>
+            </a:r>
+            <a:r>
+              <a:rPr lang="en-US" altLang="ko-KR"/>
+              <a:t>, </a:t>
+            </a:r>
+            <a:r>
+              <a:rPr lang="ko-KR" altLang="en-US"/>
+              <a:t>해커가 </a:t>
+            </a:r>
+            <a:r>
+              <a:rPr lang="en-US" altLang="ko-KR"/>
+              <a:t>www-data </a:t>
+            </a:r>
+            <a:r>
+              <a:rPr lang="ko-KR" altLang="en-US"/>
+              <a:t>권한을 뺏게 됨</a:t>
+            </a:r>
+            <a:r>
+              <a:rPr lang="en-US" altLang="ko-KR"/>
+              <a:t>.)</a:t>
+            </a:r>
+          </a:p>
+          <a:p>
+            <a:endParaRPr lang="en-US" altLang="ko-KR"/>
+          </a:p>
+          <a:p>
+            <a:r>
+              <a:rPr lang="ko-KR" altLang="en-US"/>
+              <a:t>깔끔하게 하려면 </a:t>
+            </a:r>
+            <a:r>
+              <a:rPr lang="en-US" altLang="ko-KR"/>
+              <a:t>clear </a:t>
+            </a:r>
+            <a:r>
+              <a:rPr lang="ko-KR" altLang="en-US"/>
+              <a:t>명령어 </a:t>
+            </a:r>
+            <a:r>
+              <a:rPr lang="en-US" altLang="ko-KR"/>
+              <a:t>or Ctrl + L</a:t>
+            </a:r>
+          </a:p>
+          <a:p>
+            <a:endParaRPr lang="en-US" altLang="ko-KR"/>
+          </a:p>
+        </p:txBody>
+      </p:sp>
+    </p:spTree>
+    <p:extLst>
+      <p:ext uri="{BB962C8B-B14F-4D97-AF65-F5344CB8AC3E}">
+        <p14:creationId xmlns:p14="http://schemas.microsoft.com/office/powerpoint/2010/main" val="3066754133"/>
+      </p:ext>
+    </p:extLst>
+  </p:cSld>
+  <p:clrMapOvr>
+    <a:masterClrMapping/>
+  </p:clrMapOvr>
+</p:sld>
+</file>
+
+<file path=ppt/slides/slide8.xml><?xml version="1.0" encoding="utf-8"?>
+<p:sld xmlns:a="http://schemas.openxmlformats.org/drawingml/2006/main" xmlns:r="http://schemas.openxmlformats.org/officeDocument/2006/relationships" xmlns:p="http://schemas.openxmlformats.org/presentationml/2006/main">
+  <p:cSld>
+    <p:spTree>
+      <p:nvGrpSpPr>
+        <p:cNvPr id="1" name=""/>
+        <p:cNvGrpSpPr/>
+        <p:nvPr/>
+      </p:nvGrpSpPr>
+      <p:grpSpPr>
+        <a:xfrm>
+          <a:off x="0" y="0"/>
+          <a:ext cx="0" cy="0"/>
+          <a:chOff x="0" y="0"/>
+          <a:chExt cx="0" cy="0"/>
+        </a:xfrm>
+      </p:grpSpPr>
+      <p:sp>
+        <p:nvSpPr>
+          <p:cNvPr id="3" name="TextBox 2">
+            <a:extLst>
+              <a:ext uri="{FF2B5EF4-FFF2-40B4-BE49-F238E27FC236}">
+                <a16:creationId xmlns:a16="http://schemas.microsoft.com/office/drawing/2014/main" id="{0729C367-B6E5-1EF2-237D-682F861B302A}"/>
+              </a:ext>
+            </a:extLst>
+          </p:cNvPr>
+          <p:cNvSpPr txBox="1"/>
+          <p:nvPr/>
+        </p:nvSpPr>
+        <p:spPr>
+          <a:xfrm>
+            <a:off x="0" y="-1"/>
+            <a:ext cx="11839074" cy="6463308"/>
+          </a:xfrm>
+          <a:prstGeom prst="rect">
+            <a:avLst/>
+          </a:prstGeom>
+          <a:noFill/>
+        </p:spPr>
+        <p:txBody>
+          <a:bodyPr wrap="square">
+            <a:spAutoFit/>
+          </a:bodyPr>
+          <a:lstStyle/>
+          <a:p>
+            <a:r>
+              <a:rPr lang="ko-KR" altLang="en-US"/>
+              <a:t>프로세스 </a:t>
+            </a:r>
+            <a:r>
+              <a:rPr lang="en-US" altLang="ko-KR"/>
+              <a:t>(</a:t>
+            </a:r>
+            <a:r>
+              <a:rPr lang="ko-KR" altLang="en-US"/>
+              <a:t>실행 중인 프로그램</a:t>
+            </a:r>
+            <a:r>
+              <a:rPr lang="en-US" altLang="ko-KR"/>
+              <a:t>, </a:t>
+            </a:r>
+            <a:r>
+              <a:rPr lang="ko-KR" altLang="en-US"/>
+              <a:t>모든 프로세스는 고유한 </a:t>
+            </a:r>
+            <a:r>
+              <a:rPr lang="en-US" altLang="ko-KR"/>
+              <a:t>PID</a:t>
+            </a:r>
+            <a:r>
+              <a:rPr lang="ko-KR" altLang="en-US"/>
+              <a:t>를 가진다</a:t>
+            </a:r>
+            <a:r>
+              <a:rPr lang="en-US" altLang="ko-KR"/>
+              <a:t>.)</a:t>
+            </a:r>
+          </a:p>
+          <a:p>
+            <a:endParaRPr lang="en-US" altLang="ko-KR"/>
+          </a:p>
+          <a:p>
+            <a:r>
+              <a:rPr lang="en-US" altLang="ko-KR"/>
+              <a:t>ps </a:t>
+            </a:r>
+            <a:r>
+              <a:rPr lang="ko-KR" altLang="en-US"/>
+              <a:t>컴퓨터에서 어떤 일이 발생하는지 확인 </a:t>
+            </a:r>
+            <a:r>
+              <a:rPr lang="en-US" altLang="ko-KR"/>
+              <a:t>(</a:t>
+            </a:r>
+            <a:r>
+              <a:rPr lang="ko-KR" altLang="en-US"/>
+              <a:t>이건 순간 느낌</a:t>
+            </a:r>
+            <a:r>
+              <a:rPr lang="en-US" altLang="ko-KR"/>
+              <a:t>)</a:t>
+            </a:r>
+          </a:p>
+          <a:p>
+            <a:r>
+              <a:rPr lang="ko-KR" altLang="en-US"/>
+              <a:t>주로 </a:t>
+            </a:r>
+            <a:r>
+              <a:rPr lang="en-US" altLang="ko-KR"/>
+              <a:t>ps aux</a:t>
+            </a:r>
+            <a:r>
+              <a:rPr lang="ko-KR" altLang="en-US"/>
+              <a:t>를 사용한다</a:t>
+            </a:r>
+            <a:r>
+              <a:rPr lang="en-US" altLang="ko-KR"/>
+              <a:t>. </a:t>
+            </a:r>
+          </a:p>
+          <a:p>
+            <a:r>
+              <a:rPr lang="en-US" altLang="ko-KR"/>
+              <a:t>(a, </a:t>
+            </a:r>
+            <a:r>
+              <a:rPr lang="ko-KR" altLang="en-US"/>
+              <a:t>모든 사용자의 프로세스 보기</a:t>
+            </a:r>
+            <a:endParaRPr lang="en-US" altLang="ko-KR"/>
+          </a:p>
+          <a:p>
+            <a:r>
+              <a:rPr lang="en-US" altLang="ko-KR"/>
+              <a:t> u, </a:t>
+            </a:r>
+            <a:r>
+              <a:rPr lang="ko-KR" altLang="en-US"/>
+              <a:t>사용자 이름과 함께 상세히 보기</a:t>
+            </a:r>
+            <a:endParaRPr lang="en-US" altLang="ko-KR"/>
+          </a:p>
+          <a:p>
+            <a:r>
+              <a:rPr lang="en-US" altLang="ko-KR"/>
+              <a:t> x, </a:t>
+            </a:r>
+            <a:r>
+              <a:rPr lang="ko-KR" altLang="en-US"/>
+              <a:t>터미널에 종속되지 않은 프로세스까지 보기</a:t>
+            </a:r>
+            <a:r>
+              <a:rPr lang="en-US" altLang="ko-KR"/>
+              <a:t>)</a:t>
+            </a:r>
+          </a:p>
+          <a:p>
+            <a:endParaRPr lang="en-US" altLang="ko-KR"/>
+          </a:p>
+          <a:p>
+            <a:r>
+              <a:rPr lang="en-US" altLang="ko-KR"/>
+              <a:t>PID</a:t>
+            </a:r>
+            <a:r>
+              <a:rPr lang="ko-KR" altLang="en-US"/>
+              <a:t> 고유번호 </a:t>
+            </a:r>
+            <a:r>
+              <a:rPr lang="en-US" altLang="ko-KR"/>
+              <a:t>(1, /sbin/init, </a:t>
+            </a:r>
+            <a:r>
+              <a:rPr lang="ko-KR" altLang="en-US"/>
+              <a:t>모든 프로세스의 조상</a:t>
+            </a:r>
+            <a:r>
+              <a:rPr lang="en-US" altLang="ko-KR"/>
+              <a:t>)</a:t>
+            </a:r>
+          </a:p>
+          <a:p>
+            <a:r>
+              <a:rPr lang="en-US" altLang="ko-KR"/>
+              <a:t>STAT </a:t>
+            </a:r>
+            <a:r>
+              <a:rPr lang="ko-KR" altLang="en-US"/>
+              <a:t>상태</a:t>
+            </a:r>
+            <a:endParaRPr lang="en-US" altLang="ko-KR"/>
+          </a:p>
+          <a:p>
+            <a:r>
+              <a:rPr lang="ko-KR" altLang="en-US"/>
+              <a:t>맨 앞자리 </a:t>
+            </a:r>
+            <a:r>
+              <a:rPr lang="en-US" altLang="ko-KR"/>
+              <a:t>(R(running), S(sleeping), D(Disk Sleep), T(Stopped))</a:t>
+            </a:r>
+          </a:p>
+          <a:p>
+            <a:r>
+              <a:rPr lang="ko-KR" altLang="en-US"/>
+              <a:t>뒷자리 붙는 것</a:t>
+            </a:r>
+            <a:endParaRPr lang="en-US" altLang="ko-KR"/>
+          </a:p>
+          <a:p>
+            <a:r>
+              <a:rPr lang="en-US" altLang="ko-KR"/>
+              <a:t>(s (small s, Session Leader, </a:t>
+            </a:r>
+            <a:r>
+              <a:rPr lang="ko-KR" altLang="en-US"/>
+              <a:t>자식 프로세스들을 거느리는 대장</a:t>
+            </a:r>
+            <a:r>
+              <a:rPr lang="en-US" altLang="ko-KR"/>
+              <a:t>)</a:t>
+            </a:r>
+          </a:p>
+          <a:p>
+            <a:r>
+              <a:rPr lang="en-US" altLang="ko-KR"/>
+              <a:t> l (small l), Multi-threaded </a:t>
+            </a:r>
+            <a:r>
+              <a:rPr lang="ko-KR" altLang="en-US"/>
+              <a:t>프로세스 안에 여러 개의 작은 스레드가 같이 일하고 있다는 뜻</a:t>
+            </a:r>
+            <a:endParaRPr lang="en-US" altLang="ko-KR"/>
+          </a:p>
+          <a:p>
+            <a:r>
+              <a:rPr lang="en-US" altLang="ko-KR"/>
+              <a:t> + (plus), Foreground </a:t>
+            </a:r>
+            <a:r>
+              <a:rPr lang="ko-KR" altLang="en-US"/>
+              <a:t>터미널 화면에서 직접적으로 연결되어 실행 중</a:t>
+            </a:r>
+            <a:endParaRPr lang="en-US" altLang="ko-KR"/>
+          </a:p>
+          <a:p>
+            <a:r>
+              <a:rPr lang="en-US" altLang="ko-KR"/>
+              <a:t> &lt; (High Priority, CPU</a:t>
+            </a:r>
+            <a:r>
+              <a:rPr lang="ko-KR" altLang="en-US"/>
+              <a:t> 우선순위가 높은 것</a:t>
+            </a:r>
+            <a:r>
+              <a:rPr lang="en-US" altLang="ko-KR"/>
+              <a:t>)</a:t>
+            </a:r>
+          </a:p>
+          <a:p>
+            <a:r>
+              <a:rPr lang="en-US" altLang="ko-KR"/>
+              <a:t> N (Low Priority, </a:t>
+            </a:r>
+            <a:r>
+              <a:rPr lang="ko-KR" altLang="en-US"/>
+              <a:t>우선순위가 낮은 것</a:t>
+            </a:r>
+            <a:r>
+              <a:rPr lang="en-US" altLang="ko-KR"/>
+              <a:t>))</a:t>
+            </a:r>
+          </a:p>
+          <a:p>
+            <a:endParaRPr lang="en-US" altLang="ko-KR"/>
+          </a:p>
+          <a:p>
+            <a:r>
+              <a:rPr lang="ko-KR" altLang="en-US"/>
+              <a:t>백그라운드 프로세스 생성</a:t>
+            </a:r>
+            <a:endParaRPr lang="en-US" altLang="ko-KR"/>
+          </a:p>
+          <a:p>
+            <a:r>
+              <a:rPr lang="en-US" altLang="ko-KR"/>
+              <a:t>sleep 100 &amp;</a:t>
+            </a:r>
+          </a:p>
+          <a:p>
+            <a:r>
+              <a:rPr lang="en-US" altLang="ko-KR"/>
+              <a:t>100</a:t>
+            </a:r>
+            <a:r>
+              <a:rPr lang="ko-KR" altLang="en-US"/>
+              <a:t>초 동안 아무것도 하지 않고 대기</a:t>
+            </a:r>
+            <a:r>
+              <a:rPr lang="en-US" altLang="ko-KR"/>
+              <a:t>, &amp;</a:t>
+            </a:r>
+            <a:r>
+              <a:rPr lang="ko-KR" altLang="en-US"/>
+              <a:t>을 붙이면 백그라운드</a:t>
+            </a:r>
+            <a:r>
+              <a:rPr lang="en-US" altLang="ko-KR"/>
+              <a:t>(</a:t>
+            </a:r>
+            <a:r>
+              <a:rPr lang="ko-KR" altLang="en-US"/>
+              <a:t>뒤쪽</a:t>
+            </a:r>
+            <a:r>
+              <a:rPr lang="en-US" altLang="ko-KR"/>
+              <a:t>)</a:t>
+            </a:r>
+            <a:r>
+              <a:rPr lang="ko-KR" altLang="en-US"/>
+              <a:t>에서 실행</a:t>
+            </a:r>
+            <a:r>
+              <a:rPr lang="en-US" altLang="ko-KR"/>
+              <a:t>.</a:t>
+            </a:r>
+          </a:p>
+          <a:p>
+            <a:r>
+              <a:rPr lang="en-US" altLang="ko-KR"/>
+              <a:t>[1] 1221 (</a:t>
+            </a:r>
+            <a:r>
+              <a:rPr lang="ko-KR" altLang="en-US"/>
+              <a:t>프로세스의 </a:t>
+            </a:r>
+            <a:r>
+              <a:rPr lang="en-US" altLang="ko-KR"/>
+              <a:t>PID)</a:t>
+            </a:r>
+          </a:p>
+          <a:p>
+            <a:endParaRPr lang="en-US" altLang="ko-KR"/>
+          </a:p>
+        </p:txBody>
+      </p:sp>
+    </p:spTree>
+    <p:extLst>
+      <p:ext uri="{BB962C8B-B14F-4D97-AF65-F5344CB8AC3E}">
+        <p14:creationId xmlns:p14="http://schemas.microsoft.com/office/powerpoint/2010/main" val="169981362"/>
+      </p:ext>
+    </p:extLst>
+  </p:cSld>
+  <p:clrMapOvr>
+    <a:masterClrMapping/>
+  </p:clrMapOvr>
+</p:sld>
+</file>
+
+<file path=ppt/slides/slide9.xml><?xml version="1.0" encoding="utf-8"?>
+<p:sld xmlns:a="http://schemas.openxmlformats.org/drawingml/2006/main" xmlns:r="http://schemas.openxmlformats.org/officeDocument/2006/relationships" xmlns:p="http://schemas.openxmlformats.org/presentationml/2006/main">
+  <p:cSld>
+    <p:spTree>
+      <p:nvGrpSpPr>
+        <p:cNvPr id="1" name="">
+          <a:extLst>
+            <a:ext uri="{FF2B5EF4-FFF2-40B4-BE49-F238E27FC236}">
+              <a16:creationId xmlns:a16="http://schemas.microsoft.com/office/drawing/2014/main" id="{46D91B15-A89E-BF73-CBD4-4AD29D772457}"/>
+            </a:ext>
+          </a:extLst>
+        </p:cNvPr>
+        <p:cNvGrpSpPr/>
+        <p:nvPr/>
+      </p:nvGrpSpPr>
+      <p:grpSpPr>
+        <a:xfrm>
+          <a:off x="0" y="0"/>
+          <a:ext cx="0" cy="0"/>
+          <a:chOff x="0" y="0"/>
+          <a:chExt cx="0" cy="0"/>
+        </a:xfrm>
+      </p:grpSpPr>
+      <p:sp>
+        <p:nvSpPr>
+          <p:cNvPr id="3" name="TextBox 2">
+            <a:extLst>
+              <a:ext uri="{FF2B5EF4-FFF2-40B4-BE49-F238E27FC236}">
+                <a16:creationId xmlns:a16="http://schemas.microsoft.com/office/drawing/2014/main" id="{F7BF5B33-2EF6-8255-1504-199761811BDB}"/>
+              </a:ext>
+            </a:extLst>
+          </p:cNvPr>
+          <p:cNvSpPr txBox="1"/>
+          <p:nvPr/>
+        </p:nvSpPr>
+        <p:spPr>
+          <a:xfrm>
+            <a:off x="0" y="-1"/>
+            <a:ext cx="12192000" cy="3416320"/>
+          </a:xfrm>
+          <a:prstGeom prst="rect">
+            <a:avLst/>
+          </a:prstGeom>
+          <a:noFill/>
+        </p:spPr>
+        <p:txBody>
+          <a:bodyPr wrap="square">
+            <a:spAutoFit/>
+          </a:bodyPr>
+          <a:lstStyle/>
+          <a:p>
+            <a:r>
+              <a:rPr lang="en-US" altLang="ko-KR"/>
+              <a:t>ps aux | grep sleep</a:t>
+            </a:r>
+          </a:p>
+          <a:p>
+            <a:r>
+              <a:rPr lang="en-US" altLang="ko-KR"/>
+              <a:t>ps</a:t>
+            </a:r>
+            <a:r>
+              <a:rPr lang="ko-KR" altLang="en-US"/>
+              <a:t> </a:t>
+            </a:r>
+            <a:r>
+              <a:rPr lang="en-US" altLang="ko-KR"/>
+              <a:t>aux</a:t>
+            </a:r>
+            <a:r>
+              <a:rPr lang="ko-KR" altLang="en-US"/>
+              <a:t>의 결과를 오른쪽 </a:t>
+            </a:r>
+            <a:r>
+              <a:rPr lang="en-US" altLang="ko-KR"/>
+              <a:t>grep sleep</a:t>
+            </a:r>
+            <a:r>
+              <a:rPr lang="ko-KR" altLang="en-US"/>
+              <a:t>으로 전달</a:t>
+            </a:r>
+            <a:r>
+              <a:rPr lang="en-US" altLang="ko-KR"/>
+              <a:t>, </a:t>
+            </a:r>
+            <a:r>
+              <a:rPr lang="ko-KR" altLang="en-US"/>
+              <a:t>방금 만든 프로세스에서 </a:t>
+            </a:r>
+            <a:r>
+              <a:rPr lang="en-US" altLang="ko-KR"/>
+              <a:t>sleep</a:t>
+            </a:r>
+            <a:r>
+              <a:rPr lang="ko-KR" altLang="en-US"/>
+              <a:t>이 들어간 녀석만 골라냄</a:t>
+            </a:r>
+            <a:r>
+              <a:rPr lang="en-US" altLang="ko-KR"/>
+              <a:t>.</a:t>
+            </a:r>
+          </a:p>
+          <a:p>
+            <a:endParaRPr lang="en-US" altLang="ko-KR"/>
+          </a:p>
+          <a:p>
+            <a:r>
+              <a:rPr lang="ko-KR" altLang="en-US"/>
+              <a:t>이러고 </a:t>
+            </a:r>
+            <a:r>
+              <a:rPr lang="en-US" altLang="ko-KR"/>
+              <a:t>PID</a:t>
+            </a:r>
+            <a:r>
+              <a:rPr lang="ko-KR" altLang="en-US"/>
+              <a:t>를 이용해서 </a:t>
+            </a:r>
+            <a:r>
+              <a:rPr lang="en-US" altLang="ko-KR"/>
+              <a:t>kill PID</a:t>
+            </a:r>
+            <a:r>
+              <a:rPr lang="ko-KR" altLang="en-US"/>
+              <a:t>를 입력하면 프로세스 제거가능</a:t>
+            </a:r>
+            <a:endParaRPr lang="en-US" altLang="ko-KR"/>
+          </a:p>
+          <a:p>
+            <a:r>
+              <a:rPr lang="en-US" altLang="ko-KR"/>
+              <a:t>pkill sleep </a:t>
+            </a:r>
+            <a:r>
+              <a:rPr lang="ko-KR" altLang="en-US"/>
+              <a:t>이렇게 입력해도 된다</a:t>
+            </a:r>
+            <a:r>
+              <a:rPr lang="en-US" altLang="ko-KR"/>
+              <a:t>.</a:t>
+            </a:r>
+          </a:p>
+          <a:p>
+            <a:endParaRPr lang="en-US" altLang="ko-KR"/>
+          </a:p>
+          <a:p>
+            <a:r>
+              <a:rPr lang="ko-KR" altLang="en-US"/>
+              <a:t>또한</a:t>
+            </a:r>
+            <a:r>
+              <a:rPr lang="en-US" altLang="ko-KR"/>
+              <a:t>, kill [PID]</a:t>
+            </a:r>
+            <a:r>
+              <a:rPr lang="ko-KR" altLang="en-US"/>
+              <a:t>는 </a:t>
+            </a:r>
+            <a:r>
+              <a:rPr lang="en-US" altLang="ko-KR"/>
+              <a:t>SIGTERM(15</a:t>
+            </a:r>
+            <a:r>
+              <a:rPr lang="ko-KR" altLang="en-US"/>
+              <a:t>번 신호</a:t>
+            </a:r>
+            <a:r>
+              <a:rPr lang="en-US" altLang="ko-KR"/>
+              <a:t>) </a:t>
+            </a:r>
+            <a:r>
+              <a:rPr lang="ko-KR" altLang="en-US"/>
+              <a:t>신호를 보내기에</a:t>
+            </a:r>
+            <a:r>
+              <a:rPr lang="en-US" altLang="ko-KR"/>
+              <a:t>, </a:t>
+            </a:r>
+            <a:r>
+              <a:rPr lang="ko-KR" altLang="en-US"/>
+              <a:t>신호를 안 받으면 제거 안될 수도</a:t>
+            </a:r>
+            <a:r>
+              <a:rPr lang="en-US" altLang="ko-KR"/>
+              <a:t>..</a:t>
+            </a:r>
+          </a:p>
+          <a:p>
+            <a:r>
+              <a:rPr lang="en-US" altLang="ko-KR"/>
+              <a:t>kill -9 [PID] (SIGKILL</a:t>
+            </a:r>
+            <a:r>
+              <a:rPr lang="ko-KR" altLang="en-US"/>
+              <a:t>은 </a:t>
+            </a:r>
+            <a:r>
+              <a:rPr lang="en-US" altLang="ko-KR"/>
+              <a:t>9</a:t>
+            </a:r>
+            <a:r>
+              <a:rPr lang="ko-KR" altLang="en-US"/>
+              <a:t>번 신호이기 때문에 바로 강제종료 때릴 수 있다</a:t>
+            </a:r>
+            <a:r>
+              <a:rPr lang="en-US" altLang="ko-KR"/>
+              <a:t>.)</a:t>
+            </a:r>
+          </a:p>
+          <a:p>
+            <a:r>
+              <a:rPr lang="ko-KR" altLang="en-US"/>
+              <a:t>단</a:t>
+            </a:r>
+            <a:r>
+              <a:rPr lang="en-US" altLang="ko-KR"/>
+              <a:t>, SIGKILL</a:t>
+            </a:r>
+            <a:r>
+              <a:rPr lang="ko-KR" altLang="en-US"/>
+              <a:t>은 저장할 틈도 없이 잘려 나가서 파일이 깨지거나 잘려나가서 파일이 깨지거나 복구가 어려울 수도 있다</a:t>
+            </a:r>
+            <a:r>
+              <a:rPr lang="en-US" altLang="ko-KR"/>
+              <a:t>.</a:t>
+            </a:r>
+          </a:p>
+          <a:p>
+            <a:endParaRPr lang="en-US" altLang="ko-KR"/>
+          </a:p>
+          <a:p>
+            <a:endParaRPr lang="en-US" altLang="ko-KR"/>
+          </a:p>
+          <a:p>
+            <a:endParaRPr lang="en-US" altLang="ko-KR"/>
+          </a:p>
+        </p:txBody>
+      </p:sp>
+    </p:spTree>
+    <p:extLst>
+      <p:ext uri="{BB962C8B-B14F-4D97-AF65-F5344CB8AC3E}">
+        <p14:creationId xmlns:p14="http://schemas.microsoft.com/office/powerpoint/2010/main" val="126110486"/>
       </p:ext>
     </p:extLst>
   </p:cSld>

--- a/Linux/리눅스 공부.pptx
+++ b/Linux/리눅스 공부.pptx
@@ -15,6 +15,8 @@
     <p:sldId id="263" r:id="rId9"/>
     <p:sldId id="264" r:id="rId10"/>
     <p:sldId id="265" r:id="rId11"/>
+    <p:sldId id="266" r:id="rId12"/>
+    <p:sldId id="267" r:id="rId13"/>
   </p:sldIdLst>
   <p:sldSz cx="12192000" cy="6858000"/>
   <p:notesSz cx="6858000" cy="9144000"/>
@@ -3595,7 +3597,7 @@
         <p:spPr>
           <a:xfrm>
             <a:off x="0" y="-1"/>
-            <a:ext cx="12192000" cy="5355312"/>
+            <a:ext cx="12192000" cy="6186309"/>
           </a:xfrm>
           <a:prstGeom prst="rect">
             <a:avLst/>
@@ -3846,10 +3848,100 @@
             </a:r>
           </a:p>
           <a:p>
-            <a:endParaRPr lang="en-US" altLang="ko-KR"/>
-          </a:p>
-          <a:p>
-            <a:endParaRPr lang="en-US" altLang="ko-KR"/>
+            <a:r>
+              <a:rPr lang="ko-KR" altLang="en-US"/>
+              <a:t>종료하려면 </a:t>
+            </a:r>
+            <a:r>
+              <a:rPr lang="en-US" altLang="ko-KR"/>
+              <a:t>Ctrl + C(SIGINT) </a:t>
+            </a:r>
+            <a:r>
+              <a:rPr lang="ko-KR" altLang="en-US"/>
+              <a:t>입력</a:t>
+            </a:r>
+            <a:r>
+              <a:rPr lang="en-US" altLang="ko-KR"/>
+              <a:t>, Ctrl + Z</a:t>
+            </a:r>
+            <a:r>
+              <a:rPr lang="ko-KR" altLang="en-US"/>
+              <a:t>는 일시정지다</a:t>
+            </a:r>
+            <a:r>
+              <a:rPr lang="en-US" altLang="ko-KR"/>
+              <a:t>.</a:t>
+            </a:r>
+          </a:p>
+          <a:p>
+            <a:endParaRPr lang="en-US" altLang="ko-KR"/>
+          </a:p>
+          <a:p>
+            <a:r>
+              <a:rPr lang="ko-KR" altLang="en-US"/>
+              <a:t>또한</a:t>
+            </a:r>
+            <a:r>
+              <a:rPr lang="en-US" altLang="ko-KR"/>
+              <a:t>, </a:t>
+            </a:r>
+            <a:r>
+              <a:rPr lang="ko-KR" altLang="en-US"/>
+              <a:t>리눅스 로그는 </a:t>
+            </a:r>
+            <a:endParaRPr lang="en-US" altLang="ko-KR"/>
+          </a:p>
+          <a:p>
+            <a:r>
+              <a:rPr lang="en-US" altLang="ko-KR"/>
+              <a:t>Kernel(</a:t>
+            </a:r>
+            <a:r>
+              <a:rPr lang="ko-KR" altLang="en-US"/>
+              <a:t>커널</a:t>
+            </a:r>
+            <a:r>
+              <a:rPr lang="en-US" altLang="ko-KR"/>
+              <a:t>): </a:t>
+            </a:r>
+            <a:r>
+              <a:rPr lang="ko-KR" altLang="en-US"/>
+              <a:t>하드웨어 결함</a:t>
+            </a:r>
+            <a:r>
+              <a:rPr lang="en-US" altLang="ko-KR"/>
+              <a:t>, </a:t>
+            </a:r>
+            <a:r>
+              <a:rPr lang="ko-KR" altLang="en-US"/>
+              <a:t>시스템 마운트</a:t>
+            </a:r>
+            <a:r>
+              <a:rPr lang="en-US" altLang="ko-KR"/>
+              <a:t>/</a:t>
+            </a:r>
+            <a:r>
+              <a:rPr lang="ko-KR" altLang="en-US"/>
+              <a:t>언마운트 같은 심각한 일 </a:t>
+            </a:r>
+            <a:r>
+              <a:rPr lang="en-US" altLang="ko-KR"/>
+              <a:t>(syslog)</a:t>
+            </a:r>
+          </a:p>
+          <a:p>
+            <a:r>
+              <a:rPr lang="en-US" altLang="ko-KR"/>
+              <a:t>Notice/Info/Debug: </a:t>
+            </a:r>
+            <a:r>
+              <a:rPr lang="ko-KR" altLang="en-US"/>
+              <a:t>일반적인 동작으로 구분해서 저장함</a:t>
+            </a:r>
+            <a:r>
+              <a:rPr lang="en-US" altLang="ko-KR"/>
+              <a:t>.  </a:t>
+            </a:r>
           </a:p>
         </p:txBody>
       </p:sp>
@@ -3857,6 +3949,596 @@
     <p:extLst>
       <p:ext uri="{BB962C8B-B14F-4D97-AF65-F5344CB8AC3E}">
         <p14:creationId xmlns:p14="http://schemas.microsoft.com/office/powerpoint/2010/main" val="837218119"/>
+      </p:ext>
+    </p:extLst>
+  </p:cSld>
+  <p:clrMapOvr>
+    <a:masterClrMapping/>
+  </p:clrMapOvr>
+</p:sld>
+</file>
+
+<file path=ppt/slides/slide11.xml><?xml version="1.0" encoding="utf-8"?>
+<p:sld xmlns:a="http://schemas.openxmlformats.org/drawingml/2006/main" xmlns:r="http://schemas.openxmlformats.org/officeDocument/2006/relationships" xmlns:p="http://schemas.openxmlformats.org/presentationml/2006/main">
+  <p:cSld>
+    <p:spTree>
+      <p:nvGrpSpPr>
+        <p:cNvPr id="1" name="">
+          <a:extLst>
+            <a:ext uri="{FF2B5EF4-FFF2-40B4-BE49-F238E27FC236}">
+              <a16:creationId xmlns:a16="http://schemas.microsoft.com/office/drawing/2014/main" id="{78CE784F-BE11-E8A7-C1AA-30DCA412B68E}"/>
+            </a:ext>
+          </a:extLst>
+        </p:cNvPr>
+        <p:cNvGrpSpPr/>
+        <p:nvPr/>
+      </p:nvGrpSpPr>
+      <p:grpSpPr>
+        <a:xfrm>
+          <a:off x="0" y="0"/>
+          <a:ext cx="0" cy="0"/>
+          <a:chOff x="0" y="0"/>
+          <a:chExt cx="0" cy="0"/>
+        </a:xfrm>
+      </p:grpSpPr>
+      <p:sp>
+        <p:nvSpPr>
+          <p:cNvPr id="3" name="TextBox 2">
+            <a:extLst>
+              <a:ext uri="{FF2B5EF4-FFF2-40B4-BE49-F238E27FC236}">
+                <a16:creationId xmlns:a16="http://schemas.microsoft.com/office/drawing/2014/main" id="{D84F2ADE-19DF-8604-7708-92BD0A4DF997}"/>
+              </a:ext>
+            </a:extLst>
+          </p:cNvPr>
+          <p:cNvSpPr txBox="1"/>
+          <p:nvPr/>
+        </p:nvSpPr>
+        <p:spPr>
+          <a:xfrm>
+            <a:off x="0" y="-1"/>
+            <a:ext cx="7828547" cy="5355312"/>
+          </a:xfrm>
+          <a:prstGeom prst="rect">
+            <a:avLst/>
+          </a:prstGeom>
+          <a:noFill/>
+        </p:spPr>
+        <p:txBody>
+          <a:bodyPr wrap="square">
+            <a:spAutoFit/>
+          </a:bodyPr>
+          <a:lstStyle/>
+          <a:p>
+            <a:r>
+              <a:rPr lang="en-US" altLang="ko-KR"/>
+              <a:t>cron (</a:t>
+            </a:r>
+            <a:r>
+              <a:rPr lang="ko-KR" altLang="en-US"/>
+              <a:t>작업자동화</a:t>
+            </a:r>
+            <a:r>
+              <a:rPr lang="en-US" altLang="ko-KR"/>
+              <a:t>)</a:t>
+            </a:r>
+          </a:p>
+          <a:p>
+            <a:endParaRPr lang="en-US" altLang="ko-KR"/>
+          </a:p>
+          <a:p>
+            <a:r>
+              <a:rPr lang="en-US" altLang="ko-KR"/>
+              <a:t>* * * * * (</a:t>
+            </a:r>
+            <a:r>
+              <a:rPr lang="ko-KR" altLang="en-US"/>
+              <a:t>분</a:t>
+            </a:r>
+            <a:r>
+              <a:rPr lang="en-US" altLang="ko-KR"/>
+              <a:t>, </a:t>
+            </a:r>
+            <a:r>
+              <a:rPr lang="ko-KR" altLang="en-US"/>
+              <a:t>시</a:t>
+            </a:r>
+            <a:r>
+              <a:rPr lang="en-US" altLang="ko-KR"/>
+              <a:t>, </a:t>
+            </a:r>
+            <a:r>
+              <a:rPr lang="ko-KR" altLang="en-US"/>
+              <a:t>일</a:t>
+            </a:r>
+            <a:r>
+              <a:rPr lang="en-US" altLang="ko-KR"/>
+              <a:t>, </a:t>
+            </a:r>
+            <a:r>
+              <a:rPr lang="ko-KR" altLang="en-US"/>
+              <a:t>월</a:t>
+            </a:r>
+            <a:r>
+              <a:rPr lang="en-US" altLang="ko-KR"/>
+              <a:t>, </a:t>
+            </a:r>
+            <a:r>
+              <a:rPr lang="ko-KR" altLang="en-US"/>
+              <a:t>요일</a:t>
+            </a:r>
+            <a:r>
+              <a:rPr lang="en-US" altLang="ko-KR"/>
+              <a:t>)</a:t>
+            </a:r>
+          </a:p>
+          <a:p>
+            <a:r>
+              <a:rPr lang="en-US" altLang="ko-KR"/>
+              <a:t>0 3 * * *: </a:t>
+            </a:r>
+            <a:r>
+              <a:rPr lang="ko-KR" altLang="en-US"/>
+              <a:t>매일 새벽 </a:t>
+            </a:r>
+            <a:r>
+              <a:rPr lang="en-US" altLang="ko-KR"/>
+              <a:t>3</a:t>
+            </a:r>
+            <a:r>
+              <a:rPr lang="ko-KR" altLang="en-US"/>
+              <a:t>시 </a:t>
+            </a:r>
+            <a:r>
+              <a:rPr lang="en-US" altLang="ko-KR"/>
+              <a:t>0</a:t>
+            </a:r>
+            <a:r>
+              <a:rPr lang="ko-KR" altLang="en-US"/>
+              <a:t>분에 실행</a:t>
+            </a:r>
+            <a:r>
+              <a:rPr lang="en-US" altLang="ko-KR"/>
+              <a:t>.</a:t>
+            </a:r>
+          </a:p>
+          <a:p>
+            <a:r>
+              <a:rPr lang="en-US" altLang="ko-KR"/>
+              <a:t>*/10 * * * *: 10</a:t>
+            </a:r>
+            <a:r>
+              <a:rPr lang="ko-KR" altLang="en-US"/>
+              <a:t>분마다 실행</a:t>
+            </a:r>
+            <a:r>
+              <a:rPr lang="en-US" altLang="ko-KR"/>
+              <a:t>.</a:t>
+            </a:r>
+          </a:p>
+          <a:p>
+            <a:endParaRPr lang="en-US" altLang="ko-KR"/>
+          </a:p>
+          <a:p>
+            <a:r>
+              <a:rPr lang="en-US" altLang="ko-KR"/>
+              <a:t>crontab –e</a:t>
+            </a:r>
+          </a:p>
+          <a:p>
+            <a:r>
+              <a:rPr lang="ko-KR" altLang="en-US"/>
+              <a:t>이걸로 설정창을 열 수 있다</a:t>
+            </a:r>
+            <a:r>
+              <a:rPr lang="en-US" altLang="ko-KR"/>
+              <a:t>. </a:t>
+            </a:r>
+            <a:r>
+              <a:rPr lang="ko-KR" altLang="en-US"/>
+              <a:t>가장 쓰기 쉬운 </a:t>
+            </a:r>
+            <a:r>
+              <a:rPr lang="en-US" altLang="ko-KR"/>
+              <a:t>nano(1</a:t>
+            </a:r>
+            <a:r>
+              <a:rPr lang="ko-KR" altLang="en-US"/>
+              <a:t>번</a:t>
+            </a:r>
+            <a:r>
+              <a:rPr lang="en-US" altLang="ko-KR"/>
+              <a:t>)</a:t>
+            </a:r>
+            <a:r>
+              <a:rPr lang="ko-KR" altLang="en-US"/>
+              <a:t>을 사용하자</a:t>
+            </a:r>
+            <a:r>
+              <a:rPr lang="en-US" altLang="ko-KR"/>
+              <a:t>.</a:t>
+            </a:r>
+          </a:p>
+          <a:p>
+            <a:endParaRPr lang="en-US" altLang="ko-KR"/>
+          </a:p>
+          <a:p>
+            <a:r>
+              <a:rPr lang="en-US" altLang="ko-KR"/>
+              <a:t>* * * * * date &gt;&gt; /home/dimo0121/my-first-study/time_log.txt</a:t>
+            </a:r>
+          </a:p>
+          <a:p>
+            <a:r>
+              <a:rPr lang="ko-KR" altLang="en-US"/>
+              <a:t>매 분마다 현재 날짜</a:t>
+            </a:r>
+            <a:r>
+              <a:rPr lang="en-US" altLang="ko-KR"/>
+              <a:t>/</a:t>
+            </a:r>
+            <a:r>
+              <a:rPr lang="ko-KR" altLang="en-US"/>
+              <a:t>시간을 가져와서 파일에 기록하라</a:t>
+            </a:r>
+            <a:r>
+              <a:rPr lang="en-US" altLang="ko-KR"/>
+              <a:t>.</a:t>
+            </a:r>
+          </a:p>
+          <a:p>
+            <a:r>
+              <a:rPr lang="en-US" altLang="ko-KR"/>
+              <a:t>Ctrl + O (</a:t>
+            </a:r>
+            <a:r>
+              <a:rPr lang="ko-KR" altLang="en-US"/>
+              <a:t>파일 저장</a:t>
+            </a:r>
+            <a:r>
+              <a:rPr lang="en-US" altLang="ko-KR"/>
+              <a:t>) -&gt; Enter (</a:t>
+            </a:r>
+            <a:r>
+              <a:rPr lang="ko-KR" altLang="en-US"/>
+              <a:t>파일 이름 확인</a:t>
+            </a:r>
+            <a:r>
+              <a:rPr lang="en-US" altLang="ko-KR"/>
+              <a:t>)</a:t>
+            </a:r>
+          </a:p>
+          <a:p>
+            <a:r>
+              <a:rPr lang="en-US" altLang="ko-KR"/>
+              <a:t>Ctrl + X (</a:t>
+            </a:r>
+            <a:r>
+              <a:rPr lang="ko-KR" altLang="en-US"/>
+              <a:t>에디터 종료</a:t>
+            </a:r>
+            <a:r>
+              <a:rPr lang="en-US" altLang="ko-KR"/>
+              <a:t>)</a:t>
+            </a:r>
+          </a:p>
+          <a:p>
+            <a:r>
+              <a:rPr lang="en-US" altLang="ko-KR"/>
+              <a:t>Ctrl + W (</a:t>
+            </a:r>
+            <a:r>
+              <a:rPr lang="ko-KR" altLang="en-US"/>
+              <a:t>검색어 검색</a:t>
+            </a:r>
+            <a:r>
+              <a:rPr lang="en-US" altLang="ko-KR"/>
+              <a:t>, </a:t>
+            </a:r>
+            <a:r>
+              <a:rPr lang="ko-KR" altLang="en-US"/>
+              <a:t>컨에프랑 같은 기능</a:t>
+            </a:r>
+            <a:r>
+              <a:rPr lang="en-US" altLang="ko-KR"/>
+              <a:t>)</a:t>
+            </a:r>
+          </a:p>
+          <a:p>
+            <a:endParaRPr lang="en-US" altLang="ko-KR"/>
+          </a:p>
+          <a:p>
+            <a:r>
+              <a:rPr lang="ko-KR" altLang="en-US"/>
+              <a:t>취소하고 싶다면 주석처리하면 된다</a:t>
+            </a:r>
+            <a:r>
+              <a:rPr lang="en-US" altLang="ko-KR"/>
+              <a:t>.</a:t>
+            </a:r>
+          </a:p>
+          <a:p>
+            <a:endParaRPr lang="en-US" altLang="ko-KR"/>
+          </a:p>
+          <a:p>
+            <a:r>
+              <a:rPr lang="en-US" altLang="ko-KR"/>
+              <a:t>nano my_script.sh (</a:t>
+            </a:r>
+            <a:r>
+              <a:rPr lang="ko-KR" altLang="en-US"/>
+              <a:t>스크립트 제작</a:t>
+            </a:r>
+            <a:r>
+              <a:rPr lang="en-US" altLang="ko-KR"/>
+              <a:t>)</a:t>
+            </a:r>
+          </a:p>
+          <a:p>
+            <a:endParaRPr lang="en-US" altLang="ko-KR"/>
+          </a:p>
+        </p:txBody>
+      </p:sp>
+    </p:spTree>
+    <p:extLst>
+      <p:ext uri="{BB962C8B-B14F-4D97-AF65-F5344CB8AC3E}">
+        <p14:creationId xmlns:p14="http://schemas.microsoft.com/office/powerpoint/2010/main" val="2234831281"/>
+      </p:ext>
+    </p:extLst>
+  </p:cSld>
+  <p:clrMapOvr>
+    <a:masterClrMapping/>
+  </p:clrMapOvr>
+</p:sld>
+</file>
+
+<file path=ppt/slides/slide12.xml><?xml version="1.0" encoding="utf-8"?>
+<p:sld xmlns:a="http://schemas.openxmlformats.org/drawingml/2006/main" xmlns:r="http://schemas.openxmlformats.org/officeDocument/2006/relationships" xmlns:p="http://schemas.openxmlformats.org/presentationml/2006/main">
+  <p:cSld>
+    <p:spTree>
+      <p:nvGrpSpPr>
+        <p:cNvPr id="1" name=""/>
+        <p:cNvGrpSpPr/>
+        <p:nvPr/>
+      </p:nvGrpSpPr>
+      <p:grpSpPr>
+        <a:xfrm>
+          <a:off x="0" y="0"/>
+          <a:ext cx="0" cy="0"/>
+          <a:chOff x="0" y="0"/>
+          <a:chExt cx="0" cy="0"/>
+        </a:xfrm>
+      </p:grpSpPr>
+      <p:sp>
+        <p:nvSpPr>
+          <p:cNvPr id="3" name="TextBox 2">
+            <a:extLst>
+              <a:ext uri="{FF2B5EF4-FFF2-40B4-BE49-F238E27FC236}">
+                <a16:creationId xmlns:a16="http://schemas.microsoft.com/office/drawing/2014/main" id="{87F8C786-EDEA-4A48-6638-A6D4CD6D8DC8}"/>
+              </a:ext>
+            </a:extLst>
+          </p:cNvPr>
+          <p:cNvSpPr txBox="1"/>
+          <p:nvPr/>
+        </p:nvSpPr>
+        <p:spPr>
+          <a:xfrm>
+            <a:off x="0" y="0"/>
+            <a:ext cx="12192000" cy="4524315"/>
+          </a:xfrm>
+          <a:prstGeom prst="rect">
+            <a:avLst/>
+          </a:prstGeom>
+          <a:noFill/>
+        </p:spPr>
+        <p:txBody>
+          <a:bodyPr wrap="square">
+            <a:spAutoFit/>
+          </a:bodyPr>
+          <a:lstStyle/>
+          <a:p>
+            <a:r>
+              <a:rPr lang="en-US" altLang="ko-KR"/>
+              <a:t>#!/bin/bash </a:t>
+            </a:r>
+          </a:p>
+          <a:p>
+            <a:r>
+              <a:rPr lang="en-US" altLang="ko-KR"/>
+              <a:t>echo "--- </a:t>
+            </a:r>
+            <a:r>
+              <a:rPr lang="ko-KR" altLang="en-US"/>
+              <a:t>시스템 점검을 시작합니다 </a:t>
+            </a:r>
+            <a:r>
+              <a:rPr lang="en-US" altLang="ko-KR"/>
+              <a:t>---" </a:t>
+            </a:r>
+          </a:p>
+          <a:p>
+            <a:r>
+              <a:rPr lang="en-US" altLang="ko-KR"/>
+              <a:t>echo "</a:t>
+            </a:r>
+            <a:r>
+              <a:rPr lang="ko-KR" altLang="en-US"/>
+              <a:t>현재 시간</a:t>
+            </a:r>
+            <a:r>
+              <a:rPr lang="en-US" altLang="ko-KR"/>
+              <a:t>: $(date)" </a:t>
+            </a:r>
+          </a:p>
+          <a:p>
+            <a:r>
+              <a:rPr lang="en-US" altLang="ko-KR"/>
+              <a:t>echo "</a:t>
+            </a:r>
+            <a:r>
+              <a:rPr lang="ko-KR" altLang="en-US"/>
+              <a:t>현재 서버의 디스크 상태</a:t>
+            </a:r>
+            <a:r>
+              <a:rPr lang="en-US" altLang="ko-KR"/>
+              <a:t>:" </a:t>
+            </a:r>
+          </a:p>
+          <a:p>
+            <a:r>
+              <a:rPr lang="en-US" altLang="ko-KR"/>
+              <a:t>df -h | grep /dev/ #(</a:t>
+            </a:r>
+            <a:r>
+              <a:rPr lang="ko-KR" altLang="en-US"/>
+              <a:t>디스크 용량 보여줌</a:t>
+            </a:r>
+            <a:r>
+              <a:rPr lang="en-US" altLang="ko-KR"/>
+              <a:t>.)</a:t>
+            </a:r>
+          </a:p>
+          <a:p>
+            <a:r>
+              <a:rPr lang="en-US" altLang="ko-KR"/>
+              <a:t>echo "--- </a:t>
+            </a:r>
+            <a:r>
+              <a:rPr lang="ko-KR" altLang="en-US"/>
+              <a:t>점검 완료 </a:t>
+            </a:r>
+            <a:r>
+              <a:rPr lang="en-US" altLang="ko-KR"/>
+              <a:t>---“</a:t>
+            </a:r>
+          </a:p>
+          <a:p>
+            <a:endParaRPr lang="en-US" altLang="ko-KR"/>
+          </a:p>
+          <a:p>
+            <a:r>
+              <a:rPr lang="en-US" altLang="ko-KR"/>
+              <a:t>Shell(</a:t>
+            </a:r>
+            <a:r>
+              <a:rPr lang="ko-KR" altLang="en-US"/>
+              <a:t>쉘</a:t>
+            </a:r>
+            <a:r>
+              <a:rPr lang="en-US" altLang="ko-KR"/>
+              <a:t>)</a:t>
+            </a:r>
+            <a:r>
+              <a:rPr lang="ko-KR" altLang="en-US"/>
+              <a:t>이란</a:t>
+            </a:r>
+            <a:r>
+              <a:rPr lang="en-US" altLang="ko-KR"/>
+              <a:t>? </a:t>
+            </a:r>
+            <a:r>
+              <a:rPr lang="ko-KR" altLang="en-US"/>
+              <a:t>컴퓨터의 가장 안쪽 하드웨어를 직접 제어하는 커널</a:t>
+            </a:r>
+            <a:r>
+              <a:rPr lang="en-US" altLang="ko-KR"/>
+              <a:t>(Kernel) </a:t>
+            </a:r>
+            <a:r>
+              <a:rPr lang="ko-KR" altLang="en-US"/>
+              <a:t>존재</a:t>
+            </a:r>
+            <a:r>
+              <a:rPr lang="en-US" altLang="ko-KR"/>
+              <a:t>, </a:t>
+            </a:r>
+          </a:p>
+          <a:p>
+            <a:r>
+              <a:rPr lang="ko-KR" altLang="en-US"/>
+              <a:t>하지만</a:t>
+            </a:r>
+            <a:r>
+              <a:rPr lang="en-US" altLang="ko-KR"/>
+              <a:t>, </a:t>
+            </a:r>
+            <a:r>
+              <a:rPr lang="ko-KR" altLang="en-US"/>
+              <a:t>커널과 직접 소통하기는 어렵기 때문에 그 겉을 감싸고 잇는 껍데기</a:t>
+            </a:r>
+            <a:r>
+              <a:rPr lang="en-US" altLang="ko-KR"/>
+              <a:t>(Shell)</a:t>
+            </a:r>
+            <a:r>
+              <a:rPr lang="ko-KR" altLang="en-US"/>
+              <a:t>이 중간에서 사람의 명령어를 받아</a:t>
+            </a:r>
+            <a:endParaRPr lang="en-US" altLang="ko-KR"/>
+          </a:p>
+          <a:p>
+            <a:r>
+              <a:rPr lang="ko-KR" altLang="en-US"/>
+              <a:t>커널에게 전달해주는 것</a:t>
+            </a:r>
+            <a:r>
+              <a:rPr lang="en-US" altLang="ko-KR"/>
+              <a:t>.</a:t>
+            </a:r>
+          </a:p>
+          <a:p>
+            <a:endParaRPr lang="en-US" altLang="ko-KR"/>
+          </a:p>
+          <a:p>
+            <a:r>
+              <a:rPr lang="en-US" altLang="ko-KR"/>
+              <a:t>Bash</a:t>
+            </a:r>
+            <a:r>
+              <a:rPr lang="ko-KR" altLang="en-US"/>
+              <a:t>는 리눅스 표준으로 어디든 다 있다</a:t>
+            </a:r>
+            <a:r>
+              <a:rPr lang="en-US" altLang="ko-KR"/>
+              <a:t>. </a:t>
+            </a:r>
+          </a:p>
+          <a:p>
+            <a:endParaRPr lang="en-US" altLang="ko-KR"/>
+          </a:p>
+          <a:p>
+            <a:r>
+              <a:rPr lang="en-US" altLang="ko-KR"/>
+              <a:t>#! (</a:t>
+            </a:r>
+            <a:r>
+              <a:rPr lang="ko-KR" altLang="en-US"/>
+              <a:t>지금부터 적는 경로에 있는 프로그램으로 이 파일을 실행하라</a:t>
+            </a:r>
+            <a:r>
+              <a:rPr lang="en-US" altLang="ko-KR"/>
+              <a:t>), /bin/bash (Bash </a:t>
+            </a:r>
+            <a:r>
+              <a:rPr lang="ko-KR" altLang="en-US"/>
+              <a:t>불러와</a:t>
+            </a:r>
+            <a:r>
+              <a:rPr lang="en-US" altLang="ko-KR"/>
+              <a:t>)</a:t>
+            </a:r>
+          </a:p>
+          <a:p>
+            <a:endParaRPr lang="en-US" altLang="ko-KR"/>
+          </a:p>
+          <a:p>
+            <a:endParaRPr lang="ko-KR" altLang="en-US"/>
+          </a:p>
+        </p:txBody>
+      </p:sp>
+    </p:spTree>
+    <p:extLst>
+      <p:ext uri="{BB962C8B-B14F-4D97-AF65-F5344CB8AC3E}">
+        <p14:creationId xmlns:p14="http://schemas.microsoft.com/office/powerpoint/2010/main" val="2781403090"/>
       </p:ext>
     </p:extLst>
   </p:cSld>
